--- a/artifacts/speaking-portfolio-expanded/decks/adaptive-systems-15min-screen.pptx
+++ b/artifacts/speaking-portfolio-expanded/decks/adaptive-systems-15min-screen.pptx
@@ -719,53 +719,53 @@
                 <a:ea typeface="Arial"/>
                 <a:cs typeface="Arial"/>
               </a:rPr>
-              <a:t xml:space="preserve">All customer data</a:t>
-            </a:r>
-            <a:endParaRPr lang="en-US" sz="1200"/>
-          </a:p>
-          <a:p>
-            <a:pPr marL="0" indent="0">
-              <a:lnSpc>
-                <a:spcPts val="1560"/>
-              </a:lnSpc>
-              <a:spcAft>
-                <a:spcPts val="0"/>
-              </a:spcAft>
-              <a:buNone/>
-            </a:pPr>
-            <a:r>
-              <a:rPr lang="en-US" sz="1200" b="0">
-                <a:solidFill>
-                  <a:srgbClr val="202b33"/>
-                </a:solidFill>
-                <a:latin typeface="Arial"/>
-                <a:ea typeface="Arial"/>
-                <a:cs typeface="Arial"/>
-              </a:rPr>
-              <a:t xml:space="preserve"/>
-            </a:r>
-            <a:endParaRPr lang="en-US" sz="1200"/>
-          </a:p>
-          <a:p>
-            <a:pPr marL="0" indent="0">
-              <a:lnSpc>
-                <a:spcPts val="1560"/>
-              </a:lnSpc>
-              <a:spcAft>
-                <a:spcPts val="0"/>
-              </a:spcAft>
-              <a:buNone/>
-            </a:pPr>
-            <a:r>
-              <a:rPr lang="en-US" sz="1200" b="0">
-                <a:solidFill>
-                  <a:srgbClr val="202b33"/>
-                </a:solidFill>
-                <a:latin typeface="Arial"/>
-                <a:ea typeface="Arial"/>
-                <a:cs typeface="Arial"/>
-              </a:rPr>
-              <a:t xml:space="preserve">Tools that email, refund, delete, deploy</a:t>
+              <a:t xml:space="preserve">Browsers, CLIs, every SaaS: an agent layer you opt out of with --no-agent</a:t>
+            </a:r>
+            <a:endParaRPr lang="en-US" sz="1200"/>
+          </a:p>
+          <a:p>
+            <a:pPr marL="0" indent="0">
+              <a:lnSpc>
+                <a:spcPts val="1560"/>
+              </a:lnSpc>
+              <a:spcAft>
+                <a:spcPts val="0"/>
+              </a:spcAft>
+              <a:buNone/>
+            </a:pPr>
+            <a:r>
+              <a:rPr lang="en-US" sz="1200" b="0">
+                <a:solidFill>
+                  <a:srgbClr val="202b33"/>
+                </a:solidFill>
+                <a:latin typeface="Arial"/>
+                <a:ea typeface="Arial"/>
+                <a:cs typeface="Arial"/>
+              </a:rPr>
+              <a:t xml:space="preserve"/>
+            </a:r>
+            <a:endParaRPr lang="en-US" sz="1200"/>
+          </a:p>
+          <a:p>
+            <a:pPr marL="0" indent="0">
+              <a:lnSpc>
+                <a:spcPts val="1560"/>
+              </a:lnSpc>
+              <a:spcAft>
+                <a:spcPts val="0"/>
+              </a:spcAft>
+              <a:buNone/>
+            </a:pPr>
+            <a:r>
+              <a:rPr lang="en-US" sz="1200" b="0">
+                <a:solidFill>
+                  <a:srgbClr val="202b33"/>
+                </a:solidFill>
+                <a:latin typeface="Arial"/>
+                <a:ea typeface="Arial"/>
+                <a:cs typeface="Arial"/>
+              </a:rPr>
+              <a:t xml:space="preserve">Ten tools is forty-five pairs. One more integration is not one more path.</a:t>
             </a:r>
             <a:endParaRPr lang="en-US" sz="1200"/>
           </a:p>
@@ -857,191 +857,191 @@
                 <a:ea typeface="Arial"/>
                 <a:cs typeface="Arial"/>
               </a:rPr>
-              <a:t xml:space="preserve">Zoom out from the ingest job. The thing we are all building toward is an assistant with access to every customer's data and a toolbox that can send email, issue refunds, delete records and ship code. Most of the damage it will ever do will be an accident: a confident mapping, a helpful cleanup, a tool called with the wrong ID.</a:t>
-            </a:r>
-            <a:endParaRPr lang="en-US" sz="1200"/>
-          </a:p>
-          <a:p>
-            <a:pPr marL="0" indent="0">
-              <a:lnSpc>
-                <a:spcPts val="1560"/>
-              </a:lnSpc>
-              <a:spcAft>
-                <a:spcPts val="0"/>
-              </a:spcAft>
-              <a:buNone/>
-            </a:pPr>
-            <a:r>
-              <a:rPr lang="en-US" sz="1200" b="0">
-                <a:solidFill>
-                  <a:srgbClr val="202b33"/>
-                </a:solidFill>
-                <a:latin typeface="Arial"/>
-                <a:ea typeface="Arial"/>
-                <a:cs typeface="Arial"/>
-              </a:rPr>
-              <a:t xml:space="preserve"/>
-            </a:r>
-            <a:endParaRPr lang="en-US" sz="1200"/>
-          </a:p>
-          <a:p>
-            <a:pPr marL="0" indent="0">
-              <a:lnSpc>
-                <a:spcPts val="1560"/>
-              </a:lnSpc>
-              <a:spcAft>
-                <a:spcPts val="0"/>
-              </a:spcAft>
-              <a:buNone/>
-            </a:pPr>
-            <a:r>
-              <a:rPr lang="en-US" sz="1200" b="0">
-                <a:solidFill>
-                  <a:srgbClr val="202b33"/>
-                </a:solidFill>
-                <a:latin typeface="Arial"/>
-                <a:ea typeface="Arial"/>
-                <a:cs typeface="Arial"/>
-              </a:rPr>
-              <a:t xml:space="preserve">Then there are the people who mean it. That renamed field could carry a sentence aimed at the model. A vendor payload is untrusted input that now gets read by something that can act.</a:t>
-            </a:r>
-            <a:endParaRPr lang="en-US" sz="1200"/>
-          </a:p>
-          <a:p>
-            <a:pPr marL="0" indent="0">
-              <a:lnSpc>
-                <a:spcPts val="1560"/>
-              </a:lnSpc>
-              <a:spcAft>
-                <a:spcPts val="0"/>
-              </a:spcAft>
-              <a:buNone/>
-            </a:pPr>
-            <a:r>
-              <a:rPr lang="en-US" sz="1200" b="0">
-                <a:solidFill>
-                  <a:srgbClr val="202b33"/>
-                </a:solidFill>
-                <a:latin typeface="Arial"/>
-                <a:ea typeface="Arial"/>
-                <a:cs typeface="Arial"/>
-              </a:rPr>
-              <a:t xml:space="preserve"/>
-            </a:r>
-            <a:endParaRPr lang="en-US" sz="1200"/>
-          </a:p>
-          <a:p>
-            <a:pPr marL="0" indent="0">
-              <a:lnSpc>
-                <a:spcPts val="1560"/>
-              </a:lnSpc>
-              <a:spcAft>
-                <a:spcPts val="0"/>
-              </a:spcAft>
-              <a:buNone/>
-            </a:pPr>
-            <a:r>
-              <a:rPr lang="en-US" sz="1200" b="0">
-                <a:solidFill>
-                  <a:srgbClr val="202b33"/>
-                </a:solidFill>
-                <a:latin typeface="Arial"/>
-                <a:ea typeface="Arial"/>
-                <a:cs typeface="Arial"/>
-              </a:rPr>
-              <a:t xml:space="preserve">So the question for the next few years is not whether to give the assistant access. It is which strategies let us give it access and manage the risk. My answer, and what I have been building, is: never build the one assistant that has everything. Conjure a small one for each job, with exactly enough.</a:t>
-            </a:r>
-            <a:endParaRPr lang="en-US" sz="1200"/>
-          </a:p>
-          <a:p>
-            <a:pPr marL="0" indent="0">
-              <a:lnSpc>
-                <a:spcPts val="1560"/>
-              </a:lnSpc>
-              <a:spcAft>
-                <a:spcPts val="0"/>
-              </a:spcAft>
-              <a:buNone/>
-            </a:pPr>
-            <a:r>
-              <a:rPr lang="en-US" sz="1200" b="0">
-                <a:solidFill>
-                  <a:srgbClr val="202b33"/>
-                </a:solidFill>
-                <a:latin typeface="Arial"/>
-                <a:ea typeface="Arial"/>
-                <a:cs typeface="Arial"/>
-              </a:rPr>
-              <a:t xml:space="preserve"/>
-            </a:r>
-            <a:endParaRPr lang="en-US" sz="1200"/>
-          </a:p>
-          <a:p>
-            <a:pPr marL="0" indent="0">
-              <a:lnSpc>
-                <a:spcPts val="1560"/>
-              </a:lnSpc>
-              <a:spcAft>
-                <a:spcPts val="0"/>
-              </a:spcAft>
-              <a:buNone/>
-            </a:pPr>
-            <a:r>
-              <a:rPr lang="en-US" sz="1200" b="0">
-                <a:solidFill>
-                  <a:srgbClr val="202b33"/>
-                </a:solidFill>
-                <a:latin typeface="Arial"/>
-                <a:ea typeface="Arial"/>
-                <a:cs typeface="Arial"/>
-              </a:rPr>
-              <a:t xml:space="preserve">Your own near miss with an over-permissioned agent, or a tool call you were glad had a dry-run flag.</a:t>
-            </a:r>
-            <a:endParaRPr lang="en-US" sz="1200"/>
-          </a:p>
-          <a:p>
-            <a:pPr marL="0" indent="0">
-              <a:lnSpc>
-                <a:spcPts val="1560"/>
-              </a:lnSpc>
-              <a:spcAft>
-                <a:spcPts val="0"/>
-              </a:spcAft>
-              <a:buNone/>
-            </a:pPr>
-            <a:r>
-              <a:rPr lang="en-US" sz="1200" b="0">
-                <a:solidFill>
-                  <a:srgbClr val="202b33"/>
-                </a:solidFill>
-                <a:latin typeface="Arial"/>
-                <a:ea typeface="Arial"/>
-                <a:cs typeface="Arial"/>
-              </a:rPr>
-              <a:t xml:space="preserve"/>
-            </a:r>
-            <a:endParaRPr lang="en-US" sz="1200"/>
-          </a:p>
-          <a:p>
-            <a:pPr marL="0" indent="0">
-              <a:lnSpc>
-                <a:spcPts val="1560"/>
-              </a:lnSpc>
-              <a:spcAft>
-                <a:spcPts val="0"/>
-              </a:spcAft>
-              <a:buNone/>
-            </a:pPr>
-            <a:r>
-              <a:rPr lang="en-US" sz="1200" b="0">
-                <a:solidFill>
-                  <a:srgbClr val="202b33"/>
-                </a:solidFill>
-                <a:latin typeface="Arial"/>
-                <a:ea typeface="Arial"/>
-                <a:cs typeface="Arial"/>
-              </a:rPr>
-              <a:t xml:space="preserve">Pause on the third line. Let the room feel that the accident case is the common one.</a:t>
+              <a:t xml:space="preserve">Zoom out from the ingest job. The assistant with every customer's data and a toolbox that can send email, issue refunds, delete records and ship code is not a design we get to decline. It is arriving one integration at a time, and not only in our products. Browsers now ship a chat that drives the page. WebMCP lets an agent act on whatever site you have open. The next generation of CLIs will take natural language by default, and you will pass `--no-agent` to get the old behavior back. The intermediary intelligence layer is going to wrap everything, and I know who to blame: the kids. Actually, the kids hate AI. It will be their kids who demand an agent safety blanket on everything. I will be in a rocking chair explaining that the internet was better on vinyl.</a:t>
+            </a:r>
+            <a:endParaRPr lang="en-US" sz="1200"/>
+          </a:p>
+          <a:p>
+            <a:pPr marL="0" indent="0">
+              <a:lnSpc>
+                <a:spcPts val="1560"/>
+              </a:lnSpc>
+              <a:spcAft>
+                <a:spcPts val="0"/>
+              </a:spcAft>
+              <a:buNone/>
+            </a:pPr>
+            <a:r>
+              <a:rPr lang="en-US" sz="1200" b="0">
+                <a:solidFill>
+                  <a:srgbClr val="202b33"/>
+                </a:solidFill>
+                <a:latin typeface="Arial"/>
+                <a:ea typeface="Arial"/>
+                <a:cs typeface="Arial"/>
+              </a:rPr>
+              <a:t xml:space="preserve"/>
+            </a:r>
+            <a:endParaRPr lang="en-US" sz="1200"/>
+          </a:p>
+          <a:p>
+            <a:pPr marL="0" indent="0">
+              <a:lnSpc>
+                <a:spcPts val="1560"/>
+              </a:lnSpc>
+              <a:spcAft>
+                <a:spcPts val="0"/>
+              </a:spcAft>
+              <a:buNone/>
+            </a:pPr>
+            <a:r>
+              <a:rPr lang="en-US" sz="1200" b="0">
+                <a:solidFill>
+                  <a:srgbClr val="202b33"/>
+                </a:solidFill>
+                <a:latin typeface="Arial"/>
+                <a:ea typeface="Arial"/>
+                <a:cs typeface="Arial"/>
+              </a:rPr>
+              <a:t xml:space="preserve">So here is the hazard, and it applies to the small systems too. Risk does not grow with the number of tools. It grows with the number of pathways between them, and every integration multiplies those. Ten tools is forty-five pairs before you count chains. Plug in one SaaS with a dozen endpoints and you did not add twelve capabilities; you added hundreds of routes from something the agent can read to something it can do. Nobody reviews those combinations. Not your security team, not the model, not you at three in the morning. The dangerous pairing is never on the roadmap. It gets discovered.</a:t>
+            </a:r>
+            <a:endParaRPr lang="en-US" sz="1200"/>
+          </a:p>
+          <a:p>
+            <a:pPr marL="0" indent="0">
+              <a:lnSpc>
+                <a:spcPts val="1560"/>
+              </a:lnSpc>
+              <a:spcAft>
+                <a:spcPts val="0"/>
+              </a:spcAft>
+              <a:buNone/>
+            </a:pPr>
+            <a:r>
+              <a:rPr lang="en-US" sz="1200" b="0">
+                <a:solidFill>
+                  <a:srgbClr val="202b33"/>
+                </a:solidFill>
+                <a:latin typeface="Arial"/>
+                <a:ea typeface="Arial"/>
+                <a:cs typeface="Arial"/>
+              </a:rPr>
+              <a:t xml:space="preserve"/>
+            </a:r>
+            <a:endParaRPr lang="en-US" sz="1200"/>
+          </a:p>
+          <a:p>
+            <a:pPr marL="0" indent="0">
+              <a:lnSpc>
+                <a:spcPts val="1560"/>
+              </a:lnSpc>
+              <a:spcAft>
+                <a:spcPts val="0"/>
+              </a:spcAft>
+              <a:buNone/>
+            </a:pPr>
+            <a:r>
+              <a:rPr lang="en-US" sz="1200" b="0">
+                <a:solidFill>
+                  <a:srgbClr val="202b33"/>
+                </a:solidFill>
+                <a:latin typeface="Arial"/>
+                <a:ea typeface="Arial"/>
+                <a:cs typeface="Arial"/>
+              </a:rPr>
+              <a:t xml:space="preserve">So the question is not whether to give the assistant access. It is how to keep the number of live pathways small enough to reason about, one job at a time. That is what the rest of this talk builds. The big assistant still exists. It just never has all of its hands full at once: it conjures a small agent per job, with exactly enough.</a:t>
+            </a:r>
+            <a:endParaRPr lang="en-US" sz="1200"/>
+          </a:p>
+          <a:p>
+            <a:pPr marL="0" indent="0">
+              <a:lnSpc>
+                <a:spcPts val="1560"/>
+              </a:lnSpc>
+              <a:spcAft>
+                <a:spcPts val="0"/>
+              </a:spcAft>
+              <a:buNone/>
+            </a:pPr>
+            <a:r>
+              <a:rPr lang="en-US" sz="1200" b="0">
+                <a:solidFill>
+                  <a:srgbClr val="202b33"/>
+                </a:solidFill>
+                <a:latin typeface="Arial"/>
+                <a:ea typeface="Arial"/>
+                <a:cs typeface="Arial"/>
+              </a:rPr>
+              <a:t xml:space="preserve"/>
+            </a:r>
+            <a:endParaRPr lang="en-US" sz="1200"/>
+          </a:p>
+          <a:p>
+            <a:pPr marL="0" indent="0">
+              <a:lnSpc>
+                <a:spcPts val="1560"/>
+              </a:lnSpc>
+              <a:spcAft>
+                <a:spcPts val="0"/>
+              </a:spcAft>
+              <a:buNone/>
+            </a:pPr>
+            <a:r>
+              <a:rPr lang="en-US" sz="1200" b="0">
+                <a:solidFill>
+                  <a:srgbClr val="202b33"/>
+                </a:solidFill>
+                <a:latin typeface="Arial"/>
+                <a:ea typeface="Arial"/>
+                <a:cs typeface="Arial"/>
+              </a:rPr>
+              <a:t xml:space="preserve">Your own near miss with an over-permissioned agent, or the tool pairing you only noticed after it fired.</a:t>
+            </a:r>
+            <a:endParaRPr lang="en-US" sz="1200"/>
+          </a:p>
+          <a:p>
+            <a:pPr marL="0" indent="0">
+              <a:lnSpc>
+                <a:spcPts val="1560"/>
+              </a:lnSpc>
+              <a:spcAft>
+                <a:spcPts val="0"/>
+              </a:spcAft>
+              <a:buNone/>
+            </a:pPr>
+            <a:r>
+              <a:rPr lang="en-US" sz="1200" b="0">
+                <a:solidFill>
+                  <a:srgbClr val="202b33"/>
+                </a:solidFill>
+                <a:latin typeface="Arial"/>
+                <a:ea typeface="Arial"/>
+                <a:cs typeface="Arial"/>
+              </a:rPr>
+              <a:t xml:space="preserve"/>
+            </a:r>
+            <a:endParaRPr lang="en-US" sz="1200"/>
+          </a:p>
+          <a:p>
+            <a:pPr marL="0" indent="0">
+              <a:lnSpc>
+                <a:spcPts val="1560"/>
+              </a:lnSpc>
+              <a:spcAft>
+                <a:spcPts val="0"/>
+              </a:spcAft>
+              <a:buNone/>
+            </a:pPr>
+            <a:r>
+              <a:rPr lang="en-US" sz="1200" b="0">
+                <a:solidFill>
+                  <a:srgbClr val="202b33"/>
+                </a:solidFill>
+                <a:latin typeface="Arial"/>
+                <a:ea typeface="Arial"/>
+                <a:cs typeface="Arial"/>
+              </a:rPr>
+              <a:t xml:space="preserve">Write 10 → 45 on the board. Ask who could list every read-to-write pathway in the agent they run today. Pause on the third line; let the room feel that the accident case is the common one.</a:t>
             </a:r>
             <a:endParaRPr lang="en-US" sz="1200"/>
           </a:p>
@@ -4203,7 +4203,7 @@
                 <a:ea typeface="Arial"/>
                 <a:cs typeface="Arial"/>
               </a:rPr>
-              <a:t xml:space="preserve">And return to the assistant with everything. We never built it. We built a factory for small ones, each with a tailored prompt, a short tool list, a hard budget, and a log of every time it asked for more. That is the strategy I believe in for the next few years: not one agent you have to trust, but many you can afford to check.</a:t>
+              <a:t xml:space="preserve">And return to the assistant with everything. It is still coming; nothing on these slides stops it, and I would not want to. What changed is how many of its pathways are live at once. Each job gets a small agent with a tailored prompt, a short tool list, a hard budget, and a log of every time it asked for more. That is the strategy I believe in for the next few years: not one agent holding every combination, which nobody can check, but many small ones you can afford to.</a:t>
             </a:r>
             <a:endParaRPr lang="en-US" sz="1200"/>
           </a:p>
@@ -4858,7 +4858,30 @@
                 <a:ea typeface="Arial"/>
                 <a:cs typeface="Arial"/>
               </a:rPr>
-              <a:t xml:space="preserve">Now imagine the assistant that has everything</a:t>
+              <a:t xml:space="preserve">The assistant with everything is coming, one</a:t>
+            </a:r>
+            <a:endParaRPr lang="en-US" sz="3900"/>
+          </a:p>
+          <a:p>
+            <a:pPr marL="0" indent="0">
+              <a:lnSpc>
+                <a:spcPts val="4680"/>
+              </a:lnSpc>
+              <a:spcAft>
+                <a:spcPts val="0"/>
+              </a:spcAft>
+              <a:buNone/>
+            </a:pPr>
+            <a:r>
+              <a:rPr lang="en-US" sz="3900" b="1">
+                <a:solidFill>
+                  <a:srgbClr val="F5F1E9"/>
+                </a:solidFill>
+                <a:latin typeface="Arial"/>
+                <a:ea typeface="Arial"/>
+                <a:cs typeface="Arial"/>
+              </a:rPr>
+              <a:t xml:space="preserve">integration at a time</a:t>
             </a:r>
             <a:endParaRPr lang="en-US" sz="3900"/>
           </a:p>
@@ -4888,7 +4911,7 @@
       </p:sp>
       <p:pic>
         <p:nvPicPr>
-          <p:cNvPr id="5" name="f205bb45584f3452c187099cc77d62202d1ca938a5d7dfba32f6435461e10a23" descr="One agent holding every customer record and every dangerous tool is a breach waiting for a typo."/>
+          <p:cNvPr id="5" name="c6f0fbb68e5ce78026448103d918b67135212db9e9f49deb90f1f192122fe3b4" descr="Every integration multiplies the pathways from something the agent can read to something it can do; nobody reviews the combinations."/>
           <p:cNvPicPr>
             <a:picLocks noChangeAspect="1"/>
           </p:cNvPicPr>

--- a/artifacts/speaking-portfolio-expanded/decks/adaptive-systems-15min-screen.pptx
+++ b/artifacts/speaking-portfolio-expanded/decks/adaptive-systems-15min-screen.pptx
@@ -857,7 +857,7 @@
                 <a:ea typeface="Arial"/>
                 <a:cs typeface="Arial"/>
               </a:rPr>
-              <a:t xml:space="preserve">Zoom out from the ingest job. The assistant with every customer's data and a toolbox that can send email, issue refunds, delete records and ship code is not a design we get to decline. It is arriving one integration at a time, and not only in our products. Browsers now ship a chat that drives the page. WebMCP lets an agent act on whatever site you have open. The next generation of CLIs will take natural language by default, and you will pass `--no-agent` to get the old behavior back. The intermediary intelligence layer is going to wrap everything, and I know who to blame: the kids. Actually, the kids hate AI. It will be their kids who demand an agent safety blanket on everything. I will be in a rocking chair explaining that the internet was better on vinyl.</a:t>
+              <a:t xml:space="preserve">Zoom out from the ingest job. The assistant with every customer's data and a toolbox that can send email, issue refunds, delete records and ship code is not a design we get to decline. It is arriving one integration at a time, and not only in our products. Browsers now ship a chat that drives the page. WebMCP lets an agent act on any site that opts in, and the list of sites that opt in only goes one direction. The next generation of CLIs will take natural language by default, and you will pass `--no-agent` to get the old behavior back. The intermediary intelligence layer is going to wrap everything, and I know who to blame: the kids. Actually, the kids hate AI. It will be their kids who demand an agent safety blanket on everything. I will be in a rocking chair explaining that the internet was better on vinyl.</a:t>
             </a:r>
             <a:endParaRPr lang="en-US" sz="1200"/>
           </a:p>
@@ -1819,7 +1819,7 @@
                 <a:ea typeface="Arial"/>
                 <a:cs typeface="Arial"/>
               </a:rPr>
-              <a:t xml:space="preserve">Read customer data and post to a vendor never share one agent</a:t>
+              <a:t xml:space="preserve">Reads customer data? Then it never posts to a vendor.</a:t>
             </a:r>
             <a:endParaRPr lang="en-US" sz="1200"/>
           </a:p>
@@ -3149,6 +3149,52 @@
                 <a:ea typeface="Arial"/>
                 <a:cs typeface="Arial"/>
               </a:rPr>
+              <a:t xml:space="preserve">Three events, three different right answers, none of them success or failure. If your dashboard only has two states, it is hiding the most interesting one.</a:t>
+            </a:r>
+            <a:endParaRPr lang="en-US" sz="1200"/>
+          </a:p>
+          <a:p>
+            <a:pPr marL="0" indent="0">
+              <a:lnSpc>
+                <a:spcPts val="1560"/>
+              </a:lnSpc>
+              <a:spcAft>
+                <a:spcPts val="0"/>
+              </a:spcAft>
+              <a:buNone/>
+            </a:pPr>
+            <a:r>
+              <a:rPr lang="en-US" sz="1200" b="0">
+                <a:solidFill>
+                  <a:srgbClr val="202b33"/>
+                </a:solidFill>
+                <a:latin typeface="Arial"/>
+                <a:ea typeface="Arial"/>
+                <a:cs typeface="Arial"/>
+              </a:rPr>
+              <a:t xml:space="preserve"/>
+            </a:r>
+            <a:endParaRPr lang="en-US" sz="1200"/>
+          </a:p>
+          <a:p>
+            <a:pPr marL="0" indent="0">
+              <a:lnSpc>
+                <a:spcPts val="1560"/>
+              </a:lnSpc>
+              <a:spcAft>
+                <a:spcPts val="0"/>
+              </a:spcAft>
+              <a:buNone/>
+            </a:pPr>
+            <a:r>
+              <a:rPr lang="en-US" sz="1200" b="0">
+                <a:solidFill>
+                  <a:srgbClr val="202b33"/>
+                </a:solidFill>
+                <a:latin typeface="Arial"/>
+                <a:ea typeface="Arial"/>
+                <a:cs typeface="Arial"/>
+              </a:rPr>
               <a:t xml:space="preserve"/>
             </a:r>
             <a:endParaRPr lang="en-US" sz="1200"/>
@@ -3241,7 +3287,7 @@
                 <a:ea typeface="Arial"/>
                 <a:cs typeface="Arial"/>
               </a:rPr>
-              <a:t xml:space="preserve">Bridge: the same orchestrator can ask for its own scale inside a per-customer budget; that is a companion talk.</a:t>
+              <a:t xml:space="preserve">Bridge: the same orchestrator can ask for its own scale inside a per-customer budget; that is slide 11 in the long version, and the mechanics are a companion talk.</a:t>
             </a:r>
             <a:endParaRPr lang="en-US" sz="1200"/>
           </a:p>
@@ -4858,30 +4904,7 @@
                 <a:ea typeface="Arial"/>
                 <a:cs typeface="Arial"/>
               </a:rPr>
-              <a:t xml:space="preserve">The assistant with everything is coming, one</a:t>
-            </a:r>
-            <a:endParaRPr lang="en-US" sz="3900"/>
-          </a:p>
-          <a:p>
-            <a:pPr marL="0" indent="0">
-              <a:lnSpc>
-                <a:spcPts val="4680"/>
-              </a:lnSpc>
-              <a:spcAft>
-                <a:spcPts val="0"/>
-              </a:spcAft>
-              <a:buNone/>
-            </a:pPr>
-            <a:r>
-              <a:rPr lang="en-US" sz="3900" b="1">
-                <a:solidFill>
-                  <a:srgbClr val="F5F1E9"/>
-                </a:solidFill>
-                <a:latin typeface="Arial"/>
-                <a:ea typeface="Arial"/>
-                <a:cs typeface="Arial"/>
-              </a:rPr>
-              <a:t xml:space="preserve">integration at a time</a:t>
+              <a:t xml:space="preserve">Sorry, You're Building It</a:t>
             </a:r>
             <a:endParaRPr lang="en-US" sz="3900"/>
           </a:p>

--- a/artifacts/speaking-portfolio-expanded/decks/adaptive-systems-15min-screen.pptx
+++ b/artifacts/speaking-portfolio-expanded/decks/adaptive-systems-15min-screen.pptx
@@ -15,7 +15,6 @@
     <p:sldId id="260" r:id="rIdSlide5"/>
     <p:sldId id="261" r:id="rIdSlide6"/>
     <p:sldId id="262" r:id="rIdSlide7"/>
-    <p:sldId id="263" r:id="rIdSlide8"/>
   </p:sldIdLst>
   <p:sldSz cx="13716000" cy="8572500" type="custom"/>
   <p:notesSz cx="6858000" cy="9144000"/>
@@ -146,7 +145,7 @@
                 <a:ea typeface="Arial"/>
                 <a:cs typeface="Arial"/>
               </a:rPr>
-              <a:t xml:space="preserve">Source slide 1. 00:00 to 01:00</a:t>
+              <a:t xml:space="preserve">Source slide 1. 00:00 to 01:45</a:t>
             </a:r>
             <a:endParaRPr lang="en-US" sz="1200"/>
           </a:p>
@@ -673,7 +672,7 @@
                 <a:ea typeface="Arial"/>
                 <a:cs typeface="Arial"/>
               </a:rPr>
-              <a:t xml:space="preserve">Source slide 3. 01:00 to 02:30</a:t>
+              <a:t xml:space="preserve">Source slide 3. 01:45 to 05:15</a:t>
             </a:r>
             <a:endParaRPr lang="en-US" sz="1200"/>
           </a:p>
@@ -857,7 +856,7 @@
                 <a:ea typeface="Arial"/>
                 <a:cs typeface="Arial"/>
               </a:rPr>
-              <a:t xml:space="preserve">Zoom out from the ingest job. The assistant with every customer's data and a toolbox that can send email, issue refunds, delete records and ship code is not a design we get to decline. It is arriving one integration at a time, and not only in our products. Browsers now ship a chat that drives the page. WebMCP lets an agent act on any site that opts in, and the list of sites that opt in only goes one direction. The next generation of CLIs will take natural language by default, and you will pass `--no-agent` to get the old behavior back. The intermediary intelligence layer is going to wrap everything, and I know who to blame: the kids. Actually, the kids hate AI. It will be their kids who demand an agent safety blanket on everything. I will be in a rocking chair explaining that the internet was better on vinyl.</a:t>
+              <a:t xml:space="preserve">Zoom out from the ingest job. The assistant with every customer's data and a toolbox that can send email, issue refunds, delete records and ship code is not a design we get to decline. It is arriving one integration at a time, and not only in our products.</a:t>
             </a:r>
             <a:endParaRPr lang="en-US" sz="1200"/>
           </a:p>
@@ -1087,7 +1086,7 @@
                 <a:ea typeface="Arial"/>
                 <a:cs typeface="Arial"/>
               </a:rPr>
-              <a:t xml:space="preserve"/>
+              <a:t xml:space="preserve">Bridge: most of the damage will be accidents before anyone means it, and a renamed field is untrusted input read by something that can act.</a:t>
             </a:r>
             <a:endParaRPr lang="en-US" sz="1200"/>
           </a:p>
@@ -1200,7 +1199,7 @@
                 <a:ea typeface="Arial"/>
                 <a:cs typeface="Arial"/>
               </a:rPr>
-              <a:t xml:space="preserve">Source slide 4. 02:30 to 05:30</a:t>
+              <a:t xml:space="preserve">Source slide 4. 05:15 to 07:00</a:t>
             </a:r>
             <a:endParaRPr lang="en-US" sz="1200"/>
           </a:p>
@@ -1431,52 +1430,6 @@
                 <a:cs typeface="Arial"/>
               </a:rPr>
               <a:t xml:space="preserve">If the agent needs something else, it asks. Dynamic tool search lets it discover a tool; policy decides whether this job may have it; the request and the answer are logged whether or not it was granted. That log is the most interesting file in the system.</a:t>
-            </a:r>
-            <a:endParaRPr lang="en-US" sz="1200"/>
-          </a:p>
-          <a:p>
-            <a:pPr marL="0" indent="0">
-              <a:lnSpc>
-                <a:spcPts val="1560"/>
-              </a:lnSpc>
-              <a:spcAft>
-                <a:spcPts val="0"/>
-              </a:spcAft>
-              <a:buNone/>
-            </a:pPr>
-            <a:r>
-              <a:rPr lang="en-US" sz="1200" b="0">
-                <a:solidFill>
-                  <a:srgbClr val="202b33"/>
-                </a:solidFill>
-                <a:latin typeface="Arial"/>
-                <a:ea typeface="Arial"/>
-                <a:cs typeface="Arial"/>
-              </a:rPr>
-              <a:t xml:space="preserve"/>
-            </a:r>
-            <a:endParaRPr lang="en-US" sz="1200"/>
-          </a:p>
-          <a:p>
-            <a:pPr marL="0" indent="0">
-              <a:lnSpc>
-                <a:spcPts val="1560"/>
-              </a:lnSpc>
-              <a:spcAft>
-                <a:spcPts val="0"/>
-              </a:spcAft>
-              <a:buNone/>
-            </a:pPr>
-            <a:r>
-              <a:rPr lang="en-US" sz="1200" b="0">
-                <a:solidFill>
-                  <a:srgbClr val="202b33"/>
-                </a:solidFill>
-                <a:latin typeface="Arial"/>
-                <a:ea typeface="Arial"/>
-                <a:cs typeface="Arial"/>
-              </a:rPr>
-              <a:t xml:space="preserve">I have this working as a prototype on my own integrations. I am not going to give you a success rate today, because I do not have one I trust yet. I can tell you the log of denied tool requests taught me more about my own permissions than any audit.</a:t>
             </a:r>
             <a:endParaRPr lang="en-US" sz="1200"/>
           </a:p>
@@ -1727,7 +1680,7 @@
                 <a:ea typeface="Arial"/>
                 <a:cs typeface="Arial"/>
               </a:rPr>
-              <a:t xml:space="preserve">Source slide 5. 05:30 to 07:00</a:t>
+              <a:t xml:space="preserve">Source slide 5. 07:00 to 08:30</a:t>
             </a:r>
             <a:endParaRPr lang="en-US" sz="1200"/>
           </a:p>
@@ -1957,52 +1910,6 @@
                 <a:ea typeface="Arial"/>
                 <a:cs typeface="Arial"/>
               </a:rPr>
-              <a:t xml:space="preserve">This is least privilege, and Saltzer and Schroeder wrote it down in 1975: every program runs with the least set of privileges the job needs. We have all been nodding at that for fifty years and shipping service accounts that can do anything. A per-job agent is the first thing I have built where complying is genuinely easier than not.</a:t>
-            </a:r>
-            <a:endParaRPr lang="en-US" sz="1200"/>
-          </a:p>
-          <a:p>
-            <a:pPr marL="0" indent="0">
-              <a:lnSpc>
-                <a:spcPts val="1560"/>
-              </a:lnSpc>
-              <a:spcAft>
-                <a:spcPts val="0"/>
-              </a:spcAft>
-              <a:buNone/>
-            </a:pPr>
-            <a:r>
-              <a:rPr lang="en-US" sz="1200" b="0">
-                <a:solidFill>
-                  <a:srgbClr val="202b33"/>
-                </a:solidFill>
-                <a:latin typeface="Arial"/>
-                <a:ea typeface="Arial"/>
-                <a:cs typeface="Arial"/>
-              </a:rPr>
-              <a:t xml:space="preserve"/>
-            </a:r>
-            <a:endParaRPr lang="en-US" sz="1200"/>
-          </a:p>
-          <a:p>
-            <a:pPr marL="0" indent="0">
-              <a:lnSpc>
-                <a:spcPts val="1560"/>
-              </a:lnSpc>
-              <a:spcAft>
-                <a:spcPts val="0"/>
-              </a:spcAft>
-              <a:buNone/>
-            </a:pPr>
-            <a:r>
-              <a:rPr lang="en-US" sz="1200" b="0">
-                <a:solidFill>
-                  <a:srgbClr val="202b33"/>
-                </a:solidFill>
-                <a:latin typeface="Arial"/>
-                <a:ea typeface="Arial"/>
-                <a:cs typeface="Arial"/>
-              </a:rPr>
               <a:t xml:space="preserve">Second, watch the boundary between systems. An agent that can read customer data and an agent that can post to a vendor are two agents, with a filter between them. That is where data leaks: not through the model being evil, but through a tool result flowing into the next tool call.</a:t>
             </a:r>
             <a:endParaRPr lang="en-US" sz="1200"/>
@@ -2049,52 +1956,6 @@
                 <a:ea typeface="Arial"/>
                 <a:cs typeface="Arial"/>
               </a:rPr>
-              <a:t xml:space="preserve">For sensitive processing, the planner gets an opaque job reference. A trusted dispatcher grants a local worker scoped access; the worker touches the data; only an allowlisted status comes back. A signed download URL is a bearer credential. Handing it to a model while asking the model not to use it is not isolation, it is hope.</a:t>
-            </a:r>
-            <a:endParaRPr lang="en-US" sz="1200"/>
-          </a:p>
-          <a:p>
-            <a:pPr marL="0" indent="0">
-              <a:lnSpc>
-                <a:spcPts val="1560"/>
-              </a:lnSpc>
-              <a:spcAft>
-                <a:spcPts val="0"/>
-              </a:spcAft>
-              <a:buNone/>
-            </a:pPr>
-            <a:r>
-              <a:rPr lang="en-US" sz="1200" b="0">
-                <a:solidFill>
-                  <a:srgbClr val="202b33"/>
-                </a:solidFill>
-                <a:latin typeface="Arial"/>
-                <a:ea typeface="Arial"/>
-                <a:cs typeface="Arial"/>
-              </a:rPr>
-              <a:t xml:space="preserve"/>
-            </a:r>
-            <a:endParaRPr lang="en-US" sz="1200"/>
-          </a:p>
-          <a:p>
-            <a:pPr marL="0" indent="0">
-              <a:lnSpc>
-                <a:spcPts val="1560"/>
-              </a:lnSpc>
-              <a:spcAft>
-                <a:spcPts val="0"/>
-              </a:spcAft>
-              <a:buNone/>
-            </a:pPr>
-            <a:r>
-              <a:rPr lang="en-US" sz="1200" b="0">
-                <a:solidFill>
-                  <a:srgbClr val="202b33"/>
-                </a:solidFill>
-                <a:latin typeface="Arial"/>
-                <a:ea typeface="Arial"/>
-                <a:cs typeface="Arial"/>
-              </a:rPr>
               <a:t xml:space="preserve">Saltzer and Schroeder (1975), [The Protection of Information in Computer Systems](https://doi.org/10.1109/PROC.1975.9939), Proceedings of the IEEE 63(9), 1278 to 1308. Least privilege is their principle (f).</a:t>
             </a:r>
             <a:endParaRPr lang="en-US" sz="1200"/>
@@ -2233,7 +2094,7 @@
                 <a:ea typeface="Arial"/>
                 <a:cs typeface="Arial"/>
               </a:rPr>
-              <a:t xml:space="preserve"/>
+              <a:t xml:space="preserve">Bridge: this is least privilege, written down by Saltzer and Schroeder in 1975; a per-job agent is the first design where complying is easier than not.</a:t>
             </a:r>
             <a:endParaRPr lang="en-US" sz="1200"/>
           </a:p>
@@ -2346,7 +2207,7 @@
                 <a:ea typeface="Arial"/>
                 <a:cs typeface="Arial"/>
               </a:rPr>
-              <a:t xml:space="preserve">Source slide 6. 07:00 to 08:30</a:t>
+              <a:t xml:space="preserve">Source slide 6. 08:30 to 09:45</a:t>
             </a:r>
             <a:endParaRPr lang="en-US" sz="1200"/>
           </a:p>
@@ -2530,52 +2391,6 @@
                 <a:ea typeface="Arial"/>
                 <a:cs typeface="Arial"/>
               </a:rPr>
-              <a:t xml:space="preserve">A Boolean status becoming an enum is harder. Does true mean active, eligible, verified, or anything except cancelled? Pending cannot become true just because both are truthy in JavaScript.</a:t>
-            </a:r>
-            <a:endParaRPr lang="en-US" sz="1200"/>
-          </a:p>
-          <a:p>
-            <a:pPr marL="0" indent="0">
-              <a:lnSpc>
-                <a:spcPts val="1560"/>
-              </a:lnSpc>
-              <a:spcAft>
-                <a:spcPts val="0"/>
-              </a:spcAft>
-              <a:buNone/>
-            </a:pPr>
-            <a:r>
-              <a:rPr lang="en-US" sz="1200" b="0">
-                <a:solidFill>
-                  <a:srgbClr val="202b33"/>
-                </a:solidFill>
-                <a:latin typeface="Arial"/>
-                <a:ea typeface="Arial"/>
-                <a:cs typeface="Arial"/>
-              </a:rPr>
-              <a:t xml:space="preserve"/>
-            </a:r>
-            <a:endParaRPr lang="en-US" sz="1200"/>
-          </a:p>
-          <a:p>
-            <a:pPr marL="0" indent="0">
-              <a:lnSpc>
-                <a:spcPts val="1560"/>
-              </a:lnSpc>
-              <a:spcAft>
-                <a:spcPts val="0"/>
-              </a:spcAft>
-              <a:buNone/>
-            </a:pPr>
-            <a:r>
-              <a:rPr lang="en-US" sz="1200" b="0">
-                <a:solidFill>
-                  <a:srgbClr val="202b33"/>
-                </a:solidFill>
-                <a:latin typeface="Arial"/>
-                <a:ea typeface="Arial"/>
-                <a:cs typeface="Arial"/>
-              </a:rPr>
               <a:t xml:space="preserve">So the generated agent may propose a reversible mapping when evidence supports equivalence, and it must quarantine the rest. An unexplained business-state change goes to an owner with samples and a question. Automatic recovery is useful precisely because it has somewhere honest to stop.</a:t>
             </a:r>
             <a:endParaRPr lang="en-US" sz="1200"/>
@@ -2714,7 +2529,7 @@
                 <a:ea typeface="Arial"/>
                 <a:cs typeface="Arial"/>
               </a:rPr>
-              <a:t xml:space="preserve">Bridge: a repair ships as a versioned artifact with a rollback, and it has to pass fixtures it did not write.</a:t>
+              <a:t xml:space="preserve">Bridge: a Boolean status becoming an enum is the hard case — pending does not become true because both are truthy. A repair ships as a versioned artifact with a rollback, and it has to pass fixtures it did not write.</a:t>
             </a:r>
             <a:endParaRPr lang="en-US" sz="1200"/>
           </a:p>
@@ -2827,7 +2642,7 @@
                 <a:ea typeface="Arial"/>
                 <a:cs typeface="Arial"/>
               </a:rPr>
-              <a:t xml:space="preserve">Source slide 10. 08:30 to 11:30</a:t>
+              <a:t xml:space="preserve">Source slide 10. 09:45 to 12:45</a:t>
             </a:r>
             <a:endParaRPr lang="en-US" sz="1200"/>
           </a:p>
@@ -3400,626 +3215,7 @@
                 <a:ea typeface="Arial"/>
                 <a:cs typeface="Arial"/>
               </a:rPr>
-              <a:t xml:space="preserve">Source slide 14. 11:30 to 14:00</a:t>
-            </a:r>
-            <a:endParaRPr lang="en-US" sz="1200"/>
-          </a:p>
-          <a:p>
-            <a:pPr marL="0" indent="0">
-              <a:lnSpc>
-                <a:spcPts val="1560"/>
-              </a:lnSpc>
-              <a:spcAft>
-                <a:spcPts val="0"/>
-              </a:spcAft>
-              <a:buNone/>
-            </a:pPr>
-            <a:r>
-              <a:rPr lang="en-US" sz="1200" b="0">
-                <a:solidFill>
-                  <a:srgbClr val="202b33"/>
-                </a:solidFill>
-                <a:latin typeface="Arial"/>
-                <a:ea typeface="Arial"/>
-                <a:cs typeface="Arial"/>
-              </a:rPr>
-              <a:t xml:space="preserve"/>
-            </a:r>
-            <a:endParaRPr lang="en-US" sz="1200"/>
-          </a:p>
-          <a:p>
-            <a:pPr marL="0" indent="0">
-              <a:lnSpc>
-                <a:spcPts val="1560"/>
-              </a:lnSpc>
-              <a:spcAft>
-                <a:spcPts val="0"/>
-              </a:spcAft>
-              <a:buNone/>
-            </a:pPr>
-            <a:r>
-              <a:rPr lang="en-US" sz="1200" b="0">
-                <a:solidFill>
-                  <a:srgbClr val="202b33"/>
-                </a:solidFill>
-                <a:latin typeface="Arial"/>
-                <a:ea typeface="Arial"/>
-                <a:cs typeface="Arial"/>
-              </a:rPr>
-              <a:t xml:space="preserve">Before returning: check relevant memory and correct known mistakes</a:t>
-            </a:r>
-            <a:endParaRPr lang="en-US" sz="1200"/>
-          </a:p>
-          <a:p>
-            <a:pPr marL="0" indent="0">
-              <a:lnSpc>
-                <a:spcPts val="1560"/>
-              </a:lnSpc>
-              <a:spcAft>
-                <a:spcPts val="0"/>
-              </a:spcAft>
-              <a:buNone/>
-            </a:pPr>
-            <a:r>
-              <a:rPr lang="en-US" sz="1200" b="0">
-                <a:solidFill>
-                  <a:srgbClr val="202b33"/>
-                </a:solidFill>
-                <a:latin typeface="Arial"/>
-                <a:ea typeface="Arial"/>
-                <a:cs typeface="Arial"/>
-              </a:rPr>
-              <a:t xml:space="preserve"/>
-            </a:r>
-            <a:endParaRPr lang="en-US" sz="1200"/>
-          </a:p>
-          <a:p>
-            <a:pPr marL="0" indent="0">
-              <a:lnSpc>
-                <a:spcPts val="1560"/>
-              </a:lnSpc>
-              <a:spcAft>
-                <a:spcPts val="0"/>
-              </a:spcAft>
-              <a:buNone/>
-            </a:pPr>
-            <a:r>
-              <a:rPr lang="en-US" sz="1200" b="0">
-                <a:solidFill>
-                  <a:srgbClr val="202b33"/>
-                </a:solidFill>
-                <a:latin typeface="Arial"/>
-                <a:ea typeface="Arial"/>
-                <a:cs typeface="Arial"/>
-              </a:rPr>
-              <a:t xml:space="preserve">After execution: record checks, outcome, correction and frequency</a:t>
-            </a:r>
-            <a:endParaRPr lang="en-US" sz="1200"/>
-          </a:p>
-          <a:p>
-            <a:pPr marL="0" indent="0">
-              <a:lnSpc>
-                <a:spcPts val="1560"/>
-              </a:lnSpc>
-              <a:spcAft>
-                <a:spcPts val="0"/>
-              </a:spcAft>
-              <a:buNone/>
-            </a:pPr>
-            <a:r>
-              <a:rPr lang="en-US" sz="1200" b="0">
-                <a:solidFill>
-                  <a:srgbClr val="202b33"/>
-                </a:solidFill>
-                <a:latin typeface="Arial"/>
-                <a:ea typeface="Arial"/>
-                <a:cs typeface="Arial"/>
-              </a:rPr>
-              <a:t xml:space="preserve"/>
-            </a:r>
-            <a:endParaRPr lang="en-US" sz="1200"/>
-          </a:p>
-          <a:p>
-            <a:pPr marL="0" indent="0">
-              <a:lnSpc>
-                <a:spcPts val="1560"/>
-              </a:lnSpc>
-              <a:spcAft>
-                <a:spcPts val="0"/>
-              </a:spcAft>
-              <a:buNone/>
-            </a:pPr>
-            <a:r>
-              <a:rPr lang="en-US" sz="1200" b="0">
-                <a:solidFill>
-                  <a:srgbClr val="202b33"/>
-                </a:solidFill>
-                <a:latin typeface="Arial"/>
-                <a:ea typeface="Arial"/>
-                <a:cs typeface="Arial"/>
-              </a:rPr>
-              <a:t xml:space="preserve">Generated, executed and verified are different states</a:t>
-            </a:r>
-            <a:endParaRPr lang="en-US" sz="1200"/>
-          </a:p>
-          <a:p>
-            <a:pPr marL="0" indent="0">
-              <a:lnSpc>
-                <a:spcPts val="1560"/>
-              </a:lnSpc>
-              <a:spcAft>
-                <a:spcPts val="0"/>
-              </a:spcAft>
-              <a:buNone/>
-            </a:pPr>
-            <a:r>
-              <a:rPr lang="en-US" sz="1200" b="0">
-                <a:solidFill>
-                  <a:srgbClr val="202b33"/>
-                </a:solidFill>
-                <a:latin typeface="Arial"/>
-                <a:ea typeface="Arial"/>
-                <a:cs typeface="Arial"/>
-              </a:rPr>
-              <a:t xml:space="preserve"/>
-            </a:r>
-            <a:endParaRPr lang="en-US" sz="1200"/>
-          </a:p>
-          <a:p>
-            <a:pPr marL="0" indent="0">
-              <a:lnSpc>
-                <a:spcPts val="1560"/>
-              </a:lnSpc>
-              <a:spcAft>
-                <a:spcPts val="0"/>
-              </a:spcAft>
-              <a:buNone/>
-            </a:pPr>
-            <a:r>
-              <a:rPr lang="en-US" sz="1200" b="0">
-                <a:solidFill>
-                  <a:srgbClr val="202b33"/>
-                </a:solidFill>
-                <a:latin typeface="Arial"/>
-                <a:ea typeface="Arial"/>
-                <a:cs typeface="Arial"/>
-              </a:rPr>
-              <a:t xml:space="preserve">Memory is evidence, never permission</a:t>
-            </a:r>
-            <a:endParaRPr lang="en-US" sz="1200"/>
-          </a:p>
-          <a:p>
-            <a:pPr marL="0" indent="0">
-              <a:lnSpc>
-                <a:spcPts val="1560"/>
-              </a:lnSpc>
-              <a:spcAft>
-                <a:spcPts val="0"/>
-              </a:spcAft>
-              <a:buNone/>
-            </a:pPr>
-            <a:r>
-              <a:rPr lang="en-US" sz="1200" b="0">
-                <a:solidFill>
-                  <a:srgbClr val="202b33"/>
-                </a:solidFill>
-                <a:latin typeface="Arial"/>
-                <a:ea typeface="Arial"/>
-                <a:cs typeface="Arial"/>
-              </a:rPr>
-              <a:t xml:space="preserve"/>
-            </a:r>
-            <a:endParaRPr lang="en-US" sz="1200"/>
-          </a:p>
-          <a:p>
-            <a:pPr marL="0" indent="0">
-              <a:lnSpc>
-                <a:spcPts val="1560"/>
-              </a:lnSpc>
-              <a:spcAft>
-                <a:spcPts val="0"/>
-              </a:spcAft>
-              <a:buNone/>
-            </a:pPr>
-            <a:r>
-              <a:rPr lang="en-US" sz="1200" b="0">
-                <a:solidFill>
-                  <a:srgbClr val="202b33"/>
-                </a:solidFill>
-                <a:latin typeface="Arial"/>
-                <a:ea typeface="Arial"/>
-                <a:cs typeface="Arial"/>
-              </a:rPr>
-              <a:t xml:space="preserve">You do not need the whole agent factory to start. Take one agent that writes SQL, builds reports, runs shell commands or generates scripted API actions. Give it working memory for this job: the goal, constraints, draft and unresolved checks. Give it observational memory across jobs: what it generated, what actually ran, what failed, and what the checks established. Now ask it to consult that history before it hands you the next answer.</a:t>
-            </a:r>
-            <a:endParaRPr lang="en-US" sz="1200"/>
-          </a:p>
-          <a:p>
-            <a:pPr marL="0" indent="0">
-              <a:lnSpc>
-                <a:spcPts val="1560"/>
-              </a:lnSpc>
-              <a:spcAft>
-                <a:spcPts val="0"/>
-              </a:spcAft>
-              <a:buNone/>
-            </a:pPr>
-            <a:r>
-              <a:rPr lang="en-US" sz="1200" b="0">
-                <a:solidFill>
-                  <a:srgbClr val="202b33"/>
-                </a:solidFill>
-                <a:latin typeface="Arial"/>
-                <a:ea typeface="Arial"/>
-                <a:cs typeface="Arial"/>
-              </a:rPr>
-              <a:t xml:space="preserve"/>
-            </a:r>
-            <a:endParaRPr lang="en-US" sz="1200"/>
-          </a:p>
-          <a:p>
-            <a:pPr marL="0" indent="0">
-              <a:lnSpc>
-                <a:spcPts val="1560"/>
-              </a:lnSpc>
-              <a:spcAft>
-                <a:spcPts val="0"/>
-              </a:spcAft>
-              <a:buNone/>
-            </a:pPr>
-            <a:r>
-              <a:rPr lang="en-US" sz="1200" b="0">
-                <a:solidFill>
-                  <a:srgbClr val="202b33"/>
-                </a:solidFill>
-                <a:latin typeface="Arial"/>
-                <a:ea typeface="Arial"/>
-                <a:cs typeface="Arial"/>
-              </a:rPr>
-              <a:t xml:space="preserve">Suppose a reporting query keeps forgetting the tenant filter. It runs perfectly well; it reports the wrong population. An independent preflight check rejects it before dispatch. Record the draft, the failed check, the correction and the eventual result. Next time, retrieve that pattern while the agent is still drafting. Fix the omission before returning the SQL, then run the check again. That is adaptive behavior you can build with one agent and a small log.</a:t>
-            </a:r>
-            <a:endParaRPr lang="en-US" sz="1200"/>
-          </a:p>
-          <a:p>
-            <a:pPr marL="0" indent="0">
-              <a:lnSpc>
-                <a:spcPts val="1560"/>
-              </a:lnSpc>
-              <a:spcAft>
-                <a:spcPts val="0"/>
-              </a:spcAft>
-              <a:buNone/>
-            </a:pPr>
-            <a:r>
-              <a:rPr lang="en-US" sz="1200" b="0">
-                <a:solidFill>
-                  <a:srgbClr val="202b33"/>
-                </a:solidFill>
-                <a:latin typeface="Arial"/>
-                <a:ea typeface="Arial"/>
-                <a:cs typeface="Arial"/>
-              </a:rPr>
-              <a:t xml:space="preserve"/>
-            </a:r>
-            <a:endParaRPr lang="en-US" sz="1200"/>
-          </a:p>
-          <a:p>
-            <a:pPr marL="0" indent="0">
-              <a:lnSpc>
-                <a:spcPts val="1560"/>
-              </a:lnSpc>
-              <a:spcAft>
-                <a:spcPts val="0"/>
-              </a:spcAft>
-              <a:buNone/>
-            </a:pPr>
-            <a:r>
-              <a:rPr lang="en-US" sz="1200" b="0">
-                <a:solidFill>
-                  <a:srgbClr val="202b33"/>
-                </a:solidFill>
-                <a:latin typeface="Arial"/>
-                <a:ea typeface="Arial"/>
-                <a:cs typeface="Arial"/>
-              </a:rPr>
-              <a:t xml:space="preserve">The instruction is simple: before returning generated work, retrieve relevant memory and correct applicable mistakes; after an authorized execution, record the observed outcome and update the pattern counts. If you cannot check something safely, say what remains unverified. Remembered output is untrusted data and grants no new permissions. The copyable prompt and a small record format are in the handout.</a:t>
-            </a:r>
-            <a:endParaRPr lang="en-US" sz="1200"/>
-          </a:p>
-          <a:p>
-            <a:pPr marL="0" indent="0">
-              <a:lnSpc>
-                <a:spcPts val="1560"/>
-              </a:lnSpc>
-              <a:spcAft>
-                <a:spcPts val="0"/>
-              </a:spcAft>
-              <a:buNone/>
-            </a:pPr>
-            <a:r>
-              <a:rPr lang="en-US" sz="1200" b="0">
-                <a:solidFill>
-                  <a:srgbClr val="202b33"/>
-                </a:solidFill>
-                <a:latin typeface="Arial"/>
-                <a:ea typeface="Arial"/>
-                <a:cs typeface="Arial"/>
-              </a:rPr>
-              <a:t xml:space="preserve"/>
-            </a:r>
-            <a:endParaRPr lang="en-US" sz="1200"/>
-          </a:p>
-          <a:p>
-            <a:pPr marL="0" indent="0">
-              <a:lnSpc>
-                <a:spcPts val="1560"/>
-              </a:lnSpc>
-              <a:spcAft>
-                <a:spcPts val="0"/>
-              </a:spcAft>
-              <a:buNone/>
-            </a:pPr>
-            <a:r>
-              <a:rPr lang="en-US" sz="1200" b="0">
-                <a:solidFill>
-                  <a:srgbClr val="202b33"/>
-                </a:solidFill>
-                <a:latin typeface="Arial"/>
-                <a:ea typeface="Arial"/>
-                <a:cs typeface="Arial"/>
-              </a:rPr>
-              <a:t xml:space="preserve">As patterns repeat, turn the reliable ones into tested templates and adapters. The runtime agent learns which evidence to consult; the offline improvement loop evaluates changes to the reusable procedure. Once the known case is covered by code, it need not spend another model call rediscovering the rule.</a:t>
-            </a:r>
-            <a:endParaRPr lang="en-US" sz="1200"/>
-          </a:p>
-          <a:p>
-            <a:pPr marL="0" indent="0">
-              <a:lnSpc>
-                <a:spcPts val="1560"/>
-              </a:lnSpc>
-              <a:spcAft>
-                <a:spcPts val="0"/>
-              </a:spcAft>
-              <a:buNone/>
-            </a:pPr>
-            <a:r>
-              <a:rPr lang="en-US" sz="1200" b="0">
-                <a:solidFill>
-                  <a:srgbClr val="202b33"/>
-                </a:solidFill>
-                <a:latin typeface="Arial"/>
-                <a:ea typeface="Arial"/>
-                <a:cs typeface="Arial"/>
-              </a:rPr>
-              <a:t xml:space="preserve"/>
-            </a:r>
-            <a:endParaRPr lang="en-US" sz="1200"/>
-          </a:p>
-          <a:p>
-            <a:pPr marL="0" indent="0">
-              <a:lnSpc>
-                <a:spcPts val="1560"/>
-              </a:lnSpc>
-              <a:spcAft>
-                <a:spcPts val="0"/>
-              </a:spcAft>
-              <a:buNone/>
-            </a:pPr>
-            <a:r>
-              <a:rPr lang="en-US" sz="1200" b="0">
-                <a:solidFill>
-                  <a:srgbClr val="202b33"/>
-                </a:solidFill>
-                <a:latin typeface="Arial"/>
-                <a:ea typeface="Arial"/>
-                <a:cs typeface="Arial"/>
-              </a:rPr>
-              <a:t xml:space="preserve"/>
-            </a:r>
-            <a:endParaRPr lang="en-US" sz="1200"/>
-          </a:p>
-          <a:p>
-            <a:pPr marL="0" indent="0">
-              <a:lnSpc>
-                <a:spcPts val="1560"/>
-              </a:lnSpc>
-              <a:spcAft>
-                <a:spcPts val="0"/>
-              </a:spcAft>
-              <a:buNone/>
-            </a:pPr>
-            <a:r>
-              <a:rPr lang="en-US" sz="1200" b="0">
-                <a:solidFill>
-                  <a:srgbClr val="202b33"/>
-                </a:solidFill>
-                <a:latin typeface="Arial"/>
-                <a:ea typeface="Arial"/>
-                <a:cs typeface="Arial"/>
-              </a:rPr>
-              <a:t xml:space="preserve"/>
-            </a:r>
-            <a:endParaRPr lang="en-US" sz="1200"/>
-          </a:p>
-          <a:p>
-            <a:pPr marL="0" indent="0">
-              <a:lnSpc>
-                <a:spcPts val="1560"/>
-              </a:lnSpc>
-              <a:spcAft>
-                <a:spcPts val="0"/>
-              </a:spcAft>
-              <a:buNone/>
-            </a:pPr>
-            <a:r>
-              <a:rPr lang="en-US" sz="1200" b="0">
-                <a:solidFill>
-                  <a:srgbClr val="202b33"/>
-                </a:solidFill>
-                <a:latin typeface="Arial"/>
-                <a:ea typeface="Arial"/>
-                <a:cs typeface="Arial"/>
-              </a:rPr>
-              <a:t xml:space="preserve">Show the prompt in memory-pattern.md. Ask which observation proves the query ran and which proves it answered the right question. Use the tenant-filter example; no live execution is needed.</a:t>
-            </a:r>
-            <a:endParaRPr lang="en-US" sz="1200"/>
-          </a:p>
-          <a:p>
-            <a:pPr marL="0" indent="0">
-              <a:lnSpc>
-                <a:spcPts val="1560"/>
-              </a:lnSpc>
-              <a:spcAft>
-                <a:spcPts val="0"/>
-              </a:spcAft>
-              <a:buNone/>
-            </a:pPr>
-            <a:r>
-              <a:rPr lang="en-US" sz="1200" b="0">
-                <a:solidFill>
-                  <a:srgbClr val="202b33"/>
-                </a:solidFill>
-                <a:latin typeface="Arial"/>
-                <a:ea typeface="Arial"/>
-                <a:cs typeface="Arial"/>
-              </a:rPr>
-              <a:t xml:space="preserve"/>
-            </a:r>
-            <a:endParaRPr lang="en-US" sz="1200"/>
-          </a:p>
-          <a:p>
-            <a:pPr marL="0" indent="0">
-              <a:lnSpc>
-                <a:spcPts val="1560"/>
-              </a:lnSpc>
-              <a:spcAft>
-                <a:spcPts val="0"/>
-              </a:spcAft>
-              <a:buNone/>
-            </a:pPr>
-            <a:r>
-              <a:rPr lang="en-US" sz="1200" b="0">
-                <a:solidFill>
-                  <a:srgbClr val="202b33"/>
-                </a:solidFill>
-                <a:latin typeface="Arial"/>
-                <a:ea typeface="Arial"/>
-                <a:cs typeface="Arial"/>
-              </a:rPr>
-              <a:t xml:space="preserve"/>
-            </a:r>
-            <a:endParaRPr lang="en-US" sz="1200"/>
-          </a:p>
-        </p:txBody>
-      </p:sp>
-    </p:spTree>
-  </p:cSld>
-  <p:clrMapOvr>
-    <a:masterClrMapping/>
-  </p:clrMapOvr>
-</p:notes>
-</file>
-
-<file path=ppt/notesSlides/notesSlide8.xml><?xml version="1.0" encoding="utf-8"?>
-<p:notes xmlns:a="http://schemas.openxmlformats.org/drawingml/2006/main" xmlns:r="http://schemas.openxmlformats.org/officeDocument/2006/relationships" xmlns:p="http://schemas.openxmlformats.org/presentationml/2006/main">
-  <p:cSld>
-    <p:spTree>
-      <p:nvGrpSpPr>
-        <p:cNvPr id="1" name=""/>
-        <p:cNvGrpSpPr/>
-        <p:nvPr/>
-      </p:nvGrpSpPr>
-      <p:grpSpPr>
-        <a:xfrm>
-          <a:off x="0" y="0"/>
-          <a:ext cx="0" cy="0"/>
-          <a:chOff x="0" y="0"/>
-          <a:chExt cx="0" cy="0"/>
-        </a:xfrm>
-      </p:grpSpPr>
-      <p:sp>
-        <p:nvSpPr>
-          <p:cNvPr id="2" name="Presenter notes"/>
-          <p:cNvSpPr txBox="1"/>
-          <p:nvPr>
-            <p:ph type="body" idx="1"/>
-          </p:nvPr>
-        </p:nvSpPr>
-        <p:spPr>
-          <a:xfrm>
-            <a:off x="457200" y="1428750"/>
-            <a:ext cx="5715000" cy="6667500"/>
-          </a:xfrm>
-        </p:spPr>
-        <p:txBody>
-          <a:bodyPr/>
-          <a:lstStyle/>
-          <a:p>
-            <a:pPr marL="0" indent="0">
-              <a:lnSpc>
-                <a:spcPts val="1560"/>
-              </a:lnSpc>
-              <a:spcAft>
-                <a:spcPts val="0"/>
-              </a:spcAft>
-              <a:buNone/>
-            </a:pPr>
-            <a:r>
-              <a:rPr lang="en-US" sz="1200" b="0">
-                <a:solidFill>
-                  <a:srgbClr val="202b33"/>
-                </a:solidFill>
-                <a:latin typeface="Arial"/>
-                <a:ea typeface="Arial"/>
-                <a:cs typeface="Arial"/>
-              </a:rPr>
-              <a:t xml:space="preserve">Adaptive, agentic apps</a:t>
-            </a:r>
-            <a:endParaRPr lang="en-US" sz="1200"/>
-          </a:p>
-          <a:p>
-            <a:pPr marL="0" indent="0">
-              <a:lnSpc>
-                <a:spcPts val="1560"/>
-              </a:lnSpc>
-              <a:spcAft>
-                <a:spcPts val="0"/>
-              </a:spcAft>
-              <a:buNone/>
-            </a:pPr>
-            <a:r>
-              <a:rPr lang="en-US" sz="1200" b="0">
-                <a:solidFill>
-                  <a:srgbClr val="202b33"/>
-                </a:solidFill>
-                <a:latin typeface="Arial"/>
-                <a:ea typeface="Arial"/>
-                <a:cs typeface="Arial"/>
-              </a:rPr>
-              <a:t xml:space="preserve"/>
-            </a:r>
-            <a:endParaRPr lang="en-US" sz="1200"/>
-          </a:p>
-          <a:p>
-            <a:pPr marL="0" indent="0">
-              <a:lnSpc>
-                <a:spcPts val="1560"/>
-              </a:lnSpc>
-              <a:spcAft>
-                <a:spcPts val="0"/>
-              </a:spcAft>
-              <a:buNone/>
-            </a:pPr>
-            <a:r>
-              <a:rPr lang="en-US" sz="1200" b="0">
-                <a:solidFill>
-                  <a:srgbClr val="202b33"/>
-                </a:solidFill>
-                <a:latin typeface="Arial"/>
-                <a:ea typeface="Arial"/>
-                <a:cs typeface="Arial"/>
-              </a:rPr>
-              <a:t xml:space="preserve">Source slide 15. 14:00 to 15:00</a:t>
+              <a:t xml:space="preserve">Source slide 15. 12:45 to 15:00</a:t>
             </a:r>
             <a:endParaRPr lang="en-US" sz="1200"/>
           </a:p>
@@ -4158,52 +3354,6 @@
                 <a:cs typeface="Arial"/>
               </a:rPr>
               <a:t xml:space="preserve">Remember the known case</a:t>
-            </a:r>
-            <a:endParaRPr lang="en-US" sz="1200"/>
-          </a:p>
-          <a:p>
-            <a:pPr marL="0" indent="0">
-              <a:lnSpc>
-                <a:spcPts val="1560"/>
-              </a:lnSpc>
-              <a:spcAft>
-                <a:spcPts val="0"/>
-              </a:spcAft>
-              <a:buNone/>
-            </a:pPr>
-            <a:r>
-              <a:rPr lang="en-US" sz="1200" b="0">
-                <a:solidFill>
-                  <a:srgbClr val="202b33"/>
-                </a:solidFill>
-                <a:latin typeface="Arial"/>
-                <a:ea typeface="Arial"/>
-                <a:cs typeface="Arial"/>
-              </a:rPr>
-              <a:t xml:space="preserve"/>
-            </a:r>
-            <a:endParaRPr lang="en-US" sz="1200"/>
-          </a:p>
-          <a:p>
-            <a:pPr marL="0" indent="0">
-              <a:lnSpc>
-                <a:spcPts val="1560"/>
-              </a:lnSpc>
-              <a:spcAft>
-                <a:spcPts val="0"/>
-              </a:spcAft>
-              <a:buNone/>
-            </a:pPr>
-            <a:r>
-              <a:rPr lang="en-US" sz="1200" b="0">
-                <a:solidFill>
-                  <a:srgbClr val="202b33"/>
-                </a:solidFill>
-                <a:latin typeface="Arial"/>
-                <a:ea typeface="Arial"/>
-                <a:cs typeface="Arial"/>
-              </a:rPr>
-              <a:t xml:space="preserve">Return to the field that changed overnight. We did not predict its spelling. We did define what had to stay true, what evidence a repair needed, which tools this one job could have, and how far the app could go without us.</a:t>
             </a:r>
             <a:endParaRPr lang="en-US" sz="1200"/>
           </a:p>
@@ -4855,7 +4005,7 @@
                 <a:ea typeface="Arial"/>
                 <a:cs typeface="Arial"/>
               </a:rPr>
-              <a:t xml:space="preserve">02 / 08    SOURCE SLIDE 3</a:t>
+              <a:t xml:space="preserve">02 / 07    SOURCE SLIDE 3</a:t>
             </a:r>
             <a:endParaRPr lang="en-US" sz="1350"/>
           </a:p>
@@ -5139,7 +4289,7 @@
                 <a:ea typeface="Arial"/>
                 <a:cs typeface="Arial"/>
               </a:rPr>
-              <a:t xml:space="preserve">03 / 08    SOURCE SLIDE 4</a:t>
+              <a:t xml:space="preserve">03 / 07    SOURCE SLIDE 4</a:t>
             </a:r>
             <a:endParaRPr lang="en-US" sz="1350"/>
           </a:p>
@@ -5423,7 +4573,7 @@
                 <a:ea typeface="Arial"/>
                 <a:cs typeface="Arial"/>
               </a:rPr>
-              <a:t xml:space="preserve">04 / 08    SOURCE SLIDE 5</a:t>
+              <a:t xml:space="preserve">04 / 07    SOURCE SLIDE 5</a:t>
             </a:r>
             <a:endParaRPr lang="en-US" sz="1350"/>
           </a:p>
@@ -5707,7 +4857,7 @@
                 <a:ea typeface="Arial"/>
                 <a:cs typeface="Arial"/>
               </a:rPr>
-              <a:t xml:space="preserve">05 / 08    SOURCE SLIDE 6</a:t>
+              <a:t xml:space="preserve">05 / 07    SOURCE SLIDE 6</a:t>
             </a:r>
             <a:endParaRPr lang="en-US" sz="1350"/>
           </a:p>
@@ -5991,7 +5141,7 @@
                 <a:ea typeface="Arial"/>
                 <a:cs typeface="Arial"/>
               </a:rPr>
-              <a:t xml:space="preserve">06 / 08    SOURCE SLIDE 10</a:t>
+              <a:t xml:space="preserve">06 / 07    SOURCE SLIDE 10</a:t>
             </a:r>
             <a:endParaRPr lang="en-US" sz="1350"/>
           </a:p>
@@ -6275,7 +5425,7 @@
                 <a:ea typeface="Arial"/>
                 <a:cs typeface="Arial"/>
               </a:rPr>
-              <a:t xml:space="preserve">07 / 08    SOURCE SLIDE 14</a:t>
+              <a:t xml:space="preserve">07 / 07    SOURCE SLIDE 15</a:t>
             </a:r>
             <a:endParaRPr lang="en-US" sz="1350"/>
           </a:p>
@@ -6324,7 +5474,7 @@
                 <a:ea typeface="Arial"/>
                 <a:cs typeface="Arial"/>
               </a:rPr>
-              <a:t xml:space="preserve">Start smaller: remember what happened</a:t>
+              <a:t xml:space="preserve">The next surprise should cost less</a:t>
             </a:r>
             <a:endParaRPr lang="en-US" sz="3900"/>
           </a:p>
@@ -6388,696 +5538,6 @@
         <p:spPr>
           <a:xfrm>
             <a:off x="2000250" y="2771775"/>
-            <a:ext cx="11029950" cy="1059180"/>
-          </a:xfrm>
-          <a:prstGeom prst="rect">
-            <a:avLst/>
-          </a:prstGeom>
-          <a:noFill/>
-          <a:ln>
-            <a:noFill/>
-          </a:ln>
-        </p:spPr>
-        <p:txBody>
-          <a:bodyPr wrap="none" lIns="0" tIns="0" rIns="0" bIns="0" anchor="t">
-            <a:noAutofit/>
-          </a:bodyPr>
-          <a:lstStyle/>
-          <a:p>
-            <a:pPr marL="0" indent="0">
-              <a:lnSpc>
-                <a:spcPts val="4095"/>
-              </a:lnSpc>
-              <a:spcAft>
-                <a:spcPts val="0"/>
-              </a:spcAft>
-              <a:buNone/>
-            </a:pPr>
-            <a:r>
-              <a:rPr lang="en-US" sz="3150" b="0">
-                <a:solidFill>
-                  <a:srgbClr val="F5F1E9"/>
-                </a:solidFill>
-                <a:latin typeface="Arial"/>
-                <a:ea typeface="Arial"/>
-                <a:cs typeface="Arial"/>
-              </a:rPr>
-              <a:t xml:space="preserve">Before returning: check relevant memory and correct</a:t>
-            </a:r>
-            <a:endParaRPr lang="en-US" sz="3150"/>
-          </a:p>
-          <a:p>
-            <a:pPr marL="0" indent="0">
-              <a:lnSpc>
-                <a:spcPts val="4095"/>
-              </a:lnSpc>
-              <a:spcAft>
-                <a:spcPts val="0"/>
-              </a:spcAft>
-              <a:buNone/>
-            </a:pPr>
-            <a:r>
-              <a:rPr lang="en-US" sz="3150" b="0">
-                <a:solidFill>
-                  <a:srgbClr val="F5F1E9"/>
-                </a:solidFill>
-                <a:latin typeface="Arial"/>
-                <a:ea typeface="Arial"/>
-                <a:cs typeface="Arial"/>
-              </a:rPr>
-              <a:t xml:space="preserve">known mistakes</a:t>
-            </a:r>
-            <a:endParaRPr lang="en-US" sz="3150"/>
-          </a:p>
-        </p:txBody>
-      </p:sp>
-      <p:sp>
-        <p:nvSpPr>
-          <p:cNvPr id="6" name="Text 6"/>
-          <p:cNvSpPr txBox="1"/>
-          <p:nvPr/>
-        </p:nvSpPr>
-        <p:spPr>
-          <a:xfrm>
-            <a:off x="685800" y="4078605"/>
-            <a:ext cx="904875" cy="476250"/>
-          </a:xfrm>
-          <a:prstGeom prst="rect">
-            <a:avLst/>
-          </a:prstGeom>
-          <a:noFill/>
-          <a:ln>
-            <a:noFill/>
-          </a:ln>
-        </p:spPr>
-        <p:txBody>
-          <a:bodyPr wrap="none" lIns="0" tIns="0" rIns="0" bIns="0" anchor="t">
-            <a:noAutofit/>
-          </a:bodyPr>
-          <a:lstStyle/>
-          <a:p>
-            <a:pPr marL="0" indent="0">
-              <a:lnSpc>
-                <a:spcPts val="2438"/>
-              </a:lnSpc>
-              <a:spcAft>
-                <a:spcPts val="0"/>
-              </a:spcAft>
-              <a:buNone/>
-            </a:pPr>
-            <a:r>
-              <a:rPr lang="en-US" sz="1875" b="0">
-                <a:solidFill>
-                  <a:srgbClr val="A4D2C4"/>
-                </a:solidFill>
-                <a:latin typeface="Arial"/>
-                <a:ea typeface="Arial"/>
-                <a:cs typeface="Arial"/>
-              </a:rPr>
-              <a:t xml:space="preserve">02</a:t>
-            </a:r>
-            <a:endParaRPr lang="en-US" sz="1875"/>
-          </a:p>
-        </p:txBody>
-      </p:sp>
-      <p:sp>
-        <p:nvSpPr>
-          <p:cNvPr id="7" name="Text 7"/>
-          <p:cNvSpPr txBox="1"/>
-          <p:nvPr/>
-        </p:nvSpPr>
-        <p:spPr>
-          <a:xfrm>
-            <a:off x="2000250" y="4078605"/>
-            <a:ext cx="11029950" cy="1059180"/>
-          </a:xfrm>
-          <a:prstGeom prst="rect">
-            <a:avLst/>
-          </a:prstGeom>
-          <a:noFill/>
-          <a:ln>
-            <a:noFill/>
-          </a:ln>
-        </p:spPr>
-        <p:txBody>
-          <a:bodyPr wrap="none" lIns="0" tIns="0" rIns="0" bIns="0" anchor="t">
-            <a:noAutofit/>
-          </a:bodyPr>
-          <a:lstStyle/>
-          <a:p>
-            <a:pPr marL="0" indent="0">
-              <a:lnSpc>
-                <a:spcPts val="4095"/>
-              </a:lnSpc>
-              <a:spcAft>
-                <a:spcPts val="0"/>
-              </a:spcAft>
-              <a:buNone/>
-            </a:pPr>
-            <a:r>
-              <a:rPr lang="en-US" sz="3150" b="0">
-                <a:solidFill>
-                  <a:srgbClr val="F5F1E9"/>
-                </a:solidFill>
-                <a:latin typeface="Arial"/>
-                <a:ea typeface="Arial"/>
-                <a:cs typeface="Arial"/>
-              </a:rPr>
-              <a:t xml:space="preserve">After execution: record checks, outcome, correction</a:t>
-            </a:r>
-            <a:endParaRPr lang="en-US" sz="3150"/>
-          </a:p>
-          <a:p>
-            <a:pPr marL="0" indent="0">
-              <a:lnSpc>
-                <a:spcPts val="4095"/>
-              </a:lnSpc>
-              <a:spcAft>
-                <a:spcPts val="0"/>
-              </a:spcAft>
-              <a:buNone/>
-            </a:pPr>
-            <a:r>
-              <a:rPr lang="en-US" sz="3150" b="0">
-                <a:solidFill>
-                  <a:srgbClr val="F5F1E9"/>
-                </a:solidFill>
-                <a:latin typeface="Arial"/>
-                <a:ea typeface="Arial"/>
-                <a:cs typeface="Arial"/>
-              </a:rPr>
-              <a:t xml:space="preserve">and frequency</a:t>
-            </a:r>
-            <a:endParaRPr lang="en-US" sz="3150"/>
-          </a:p>
-        </p:txBody>
-      </p:sp>
-      <p:sp>
-        <p:nvSpPr>
-          <p:cNvPr id="8" name="Text 8"/>
-          <p:cNvSpPr txBox="1"/>
-          <p:nvPr/>
-        </p:nvSpPr>
-        <p:spPr>
-          <a:xfrm>
-            <a:off x="685800" y="5385435"/>
-            <a:ext cx="904875" cy="476250"/>
-          </a:xfrm>
-          <a:prstGeom prst="rect">
-            <a:avLst/>
-          </a:prstGeom>
-          <a:noFill/>
-          <a:ln>
-            <a:noFill/>
-          </a:ln>
-        </p:spPr>
-        <p:txBody>
-          <a:bodyPr wrap="none" lIns="0" tIns="0" rIns="0" bIns="0" anchor="t">
-            <a:noAutofit/>
-          </a:bodyPr>
-          <a:lstStyle/>
-          <a:p>
-            <a:pPr marL="0" indent="0">
-              <a:lnSpc>
-                <a:spcPts val="2438"/>
-              </a:lnSpc>
-              <a:spcAft>
-                <a:spcPts val="0"/>
-              </a:spcAft>
-              <a:buNone/>
-            </a:pPr>
-            <a:r>
-              <a:rPr lang="en-US" sz="1875" b="0">
-                <a:solidFill>
-                  <a:srgbClr val="A4D2C4"/>
-                </a:solidFill>
-                <a:latin typeface="Arial"/>
-                <a:ea typeface="Arial"/>
-                <a:cs typeface="Arial"/>
-              </a:rPr>
-              <a:t xml:space="preserve">03</a:t>
-            </a:r>
-            <a:endParaRPr lang="en-US" sz="1875"/>
-          </a:p>
-        </p:txBody>
-      </p:sp>
-      <p:sp>
-        <p:nvSpPr>
-          <p:cNvPr id="9" name="Text 9"/>
-          <p:cNvSpPr txBox="1"/>
-          <p:nvPr/>
-        </p:nvSpPr>
-        <p:spPr>
-          <a:xfrm>
-            <a:off x="2000250" y="5385435"/>
-            <a:ext cx="11029950" cy="1059180"/>
-          </a:xfrm>
-          <a:prstGeom prst="rect">
-            <a:avLst/>
-          </a:prstGeom>
-          <a:noFill/>
-          <a:ln>
-            <a:noFill/>
-          </a:ln>
-        </p:spPr>
-        <p:txBody>
-          <a:bodyPr wrap="none" lIns="0" tIns="0" rIns="0" bIns="0" anchor="t">
-            <a:noAutofit/>
-          </a:bodyPr>
-          <a:lstStyle/>
-          <a:p>
-            <a:pPr marL="0" indent="0">
-              <a:lnSpc>
-                <a:spcPts val="4095"/>
-              </a:lnSpc>
-              <a:spcAft>
-                <a:spcPts val="0"/>
-              </a:spcAft>
-              <a:buNone/>
-            </a:pPr>
-            <a:r>
-              <a:rPr lang="en-US" sz="3150" b="0">
-                <a:solidFill>
-                  <a:srgbClr val="F5F1E9"/>
-                </a:solidFill>
-                <a:latin typeface="Arial"/>
-                <a:ea typeface="Arial"/>
-                <a:cs typeface="Arial"/>
-              </a:rPr>
-              <a:t xml:space="preserve">Generated, executed and verified are different</a:t>
-            </a:r>
-            <a:endParaRPr lang="en-US" sz="3150"/>
-          </a:p>
-          <a:p>
-            <a:pPr marL="0" indent="0">
-              <a:lnSpc>
-                <a:spcPts val="4095"/>
-              </a:lnSpc>
-              <a:spcAft>
-                <a:spcPts val="0"/>
-              </a:spcAft>
-              <a:buNone/>
-            </a:pPr>
-            <a:r>
-              <a:rPr lang="en-US" sz="3150" b="0">
-                <a:solidFill>
-                  <a:srgbClr val="F5F1E9"/>
-                </a:solidFill>
-                <a:latin typeface="Arial"/>
-                <a:ea typeface="Arial"/>
-                <a:cs typeface="Arial"/>
-              </a:rPr>
-              <a:t xml:space="preserve">states</a:t>
-            </a:r>
-            <a:endParaRPr lang="en-US" sz="3150"/>
-          </a:p>
-        </p:txBody>
-      </p:sp>
-      <p:sp>
-        <p:nvSpPr>
-          <p:cNvPr id="10" name="Text 10"/>
-          <p:cNvSpPr txBox="1"/>
-          <p:nvPr/>
-        </p:nvSpPr>
-        <p:spPr>
-          <a:xfrm>
-            <a:off x="685800" y="6692265"/>
-            <a:ext cx="904875" cy="476250"/>
-          </a:xfrm>
-          <a:prstGeom prst="rect">
-            <a:avLst/>
-          </a:prstGeom>
-          <a:noFill/>
-          <a:ln>
-            <a:noFill/>
-          </a:ln>
-        </p:spPr>
-        <p:txBody>
-          <a:bodyPr wrap="none" lIns="0" tIns="0" rIns="0" bIns="0" anchor="t">
-            <a:noAutofit/>
-          </a:bodyPr>
-          <a:lstStyle/>
-          <a:p>
-            <a:pPr marL="0" indent="0">
-              <a:lnSpc>
-                <a:spcPts val="2438"/>
-              </a:lnSpc>
-              <a:spcAft>
-                <a:spcPts val="0"/>
-              </a:spcAft>
-              <a:buNone/>
-            </a:pPr>
-            <a:r>
-              <a:rPr lang="en-US" sz="1875" b="0">
-                <a:solidFill>
-                  <a:srgbClr val="A4D2C4"/>
-                </a:solidFill>
-                <a:latin typeface="Arial"/>
-                <a:ea typeface="Arial"/>
-                <a:cs typeface="Arial"/>
-              </a:rPr>
-              <a:t xml:space="preserve">04</a:t>
-            </a:r>
-            <a:endParaRPr lang="en-US" sz="1875"/>
-          </a:p>
-        </p:txBody>
-      </p:sp>
-      <p:sp>
-        <p:nvSpPr>
-          <p:cNvPr id="11" name="Text 11"/>
-          <p:cNvSpPr txBox="1"/>
-          <p:nvPr/>
-        </p:nvSpPr>
-        <p:spPr>
-          <a:xfrm>
-            <a:off x="2000250" y="6692265"/>
-            <a:ext cx="11029950" cy="539115"/>
-          </a:xfrm>
-          <a:prstGeom prst="rect">
-            <a:avLst/>
-          </a:prstGeom>
-          <a:noFill/>
-          <a:ln>
-            <a:noFill/>
-          </a:ln>
-        </p:spPr>
-        <p:txBody>
-          <a:bodyPr wrap="none" lIns="0" tIns="0" rIns="0" bIns="0" anchor="t">
-            <a:noAutofit/>
-          </a:bodyPr>
-          <a:lstStyle/>
-          <a:p>
-            <a:pPr marL="0" indent="0">
-              <a:lnSpc>
-                <a:spcPts val="4095"/>
-              </a:lnSpc>
-              <a:spcAft>
-                <a:spcPts val="0"/>
-              </a:spcAft>
-              <a:buNone/>
-            </a:pPr>
-            <a:r>
-              <a:rPr lang="en-US" sz="3150" b="0">
-                <a:solidFill>
-                  <a:srgbClr val="F5F1E9"/>
-                </a:solidFill>
-                <a:latin typeface="Arial"/>
-                <a:ea typeface="Arial"/>
-                <a:cs typeface="Arial"/>
-              </a:rPr>
-              <a:t xml:space="preserve">Memory is evidence, never permission</a:t>
-            </a:r>
-            <a:endParaRPr lang="en-US" sz="3150"/>
-          </a:p>
-        </p:txBody>
-      </p:sp>
-      <p:sp>
-        <p:nvSpPr>
-          <p:cNvPr id="12" name="Text 12"/>
-          <p:cNvSpPr txBox="1"/>
-          <p:nvPr/>
-        </p:nvSpPr>
-        <p:spPr>
-          <a:xfrm>
-            <a:off x="457200" y="8286750"/>
-            <a:ext cx="12477750" cy="190500"/>
-          </a:xfrm>
-          <a:prstGeom prst="rect">
-            <a:avLst/>
-          </a:prstGeom>
-          <a:noFill/>
-          <a:ln>
-            <a:noFill/>
-          </a:ln>
-        </p:spPr>
-        <p:txBody>
-          <a:bodyPr wrap="none" lIns="0" tIns="0" rIns="0" bIns="0" anchor="t">
-            <a:noAutofit/>
-          </a:bodyPr>
-          <a:lstStyle/>
-          <a:p>
-            <a:pPr marL="0" indent="0">
-              <a:lnSpc>
-                <a:spcPts val="1268"/>
-              </a:lnSpc>
-              <a:spcAft>
-                <a:spcPts val="0"/>
-              </a:spcAft>
-              <a:buNone/>
-            </a:pPr>
-            <a:r>
-              <a:rPr lang="en-US" sz="975" b="0">
-                <a:solidFill>
-                  <a:srgbClr val="BEC9C6"/>
-                </a:solidFill>
-                <a:latin typeface="Arial"/>
-                <a:ea typeface="Arial"/>
-                <a:cs typeface="Arial"/>
-              </a:rPr>
-              <a:t xml:space="preserve">Adaptive, agentic apps</a:t>
-            </a:r>
-            <a:endParaRPr lang="en-US" sz="975"/>
-          </a:p>
-        </p:txBody>
-      </p:sp>
-      <p:sp>
-        <p:nvSpPr>
-          <p:cNvPr id="13" name="Text 13"/>
-          <p:cNvSpPr txBox="1"/>
-          <p:nvPr/>
-        </p:nvSpPr>
-        <p:spPr>
-          <a:xfrm>
-            <a:off x="13049250" y="8286750"/>
-            <a:ext cx="238125" cy="190500"/>
-          </a:xfrm>
-          <a:prstGeom prst="rect">
-            <a:avLst/>
-          </a:prstGeom>
-          <a:noFill/>
-          <a:ln>
-            <a:noFill/>
-          </a:ln>
-        </p:spPr>
-        <p:txBody>
-          <a:bodyPr wrap="none" lIns="0" tIns="0" rIns="0" bIns="0" anchor="t">
-            <a:noAutofit/>
-          </a:bodyPr>
-          <a:lstStyle/>
-          <a:p>
-            <a:pPr marL="0" indent="0">
-              <a:lnSpc>
-                <a:spcPts val="1268"/>
-              </a:lnSpc>
-              <a:spcAft>
-                <a:spcPts val="0"/>
-              </a:spcAft>
-              <a:buNone/>
-            </a:pPr>
-            <a:r>
-              <a:rPr lang="en-US" sz="975" b="0">
-                <a:solidFill>
-                  <a:srgbClr val="BEC9C6"/>
-                </a:solidFill>
-                <a:latin typeface="Arial"/>
-                <a:ea typeface="Arial"/>
-                <a:cs typeface="Arial"/>
-              </a:rPr>
-              <a:t xml:space="preserve">7</a:t>
-            </a:r>
-            <a:endParaRPr lang="en-US" sz="975"/>
-          </a:p>
-        </p:txBody>
-      </p:sp>
-    </p:spTree>
-  </p:cSld>
-  <p:clrMapOvr>
-    <a:masterClrMapping/>
-  </p:clrMapOvr>
-</p:sld>
-</file>
-
-<file path=ppt/slides/slide8.xml><?xml version="1.0" encoding="utf-8"?>
-<p:sld xmlns:a="http://schemas.openxmlformats.org/drawingml/2006/main" xmlns:r="http://schemas.openxmlformats.org/officeDocument/2006/relationships" xmlns:p="http://schemas.openxmlformats.org/presentationml/2006/main">
-  <p:cSld name="Slide 8">
-    <p:bg>
-      <p:bgPr>
-        <a:solidFill>
-          <a:srgbClr val="122323"/>
-        </a:solidFill>
-        <a:effectLst/>
-      </p:bgPr>
-    </p:bg>
-    <p:spTree>
-      <p:nvGrpSpPr>
-        <p:cNvPr id="1" name=""/>
-        <p:cNvGrpSpPr/>
-        <p:nvPr/>
-      </p:nvGrpSpPr>
-      <p:grpSpPr>
-        <a:xfrm>
-          <a:off x="0" y="0"/>
-          <a:ext cx="0" cy="0"/>
-          <a:chOff x="0" y="0"/>
-          <a:chExt cx="0" cy="0"/>
-        </a:xfrm>
-      </p:grpSpPr>
-      <p:sp>
-        <p:nvSpPr>
-          <p:cNvPr id="2" name="Text 2"/>
-          <p:cNvSpPr txBox="1"/>
-          <p:nvPr/>
-        </p:nvSpPr>
-        <p:spPr>
-          <a:xfrm>
-            <a:off x="685800" y="381000"/>
-            <a:ext cx="12344400" cy="457200"/>
-          </a:xfrm>
-          <a:prstGeom prst="rect">
-            <a:avLst/>
-          </a:prstGeom>
-          <a:noFill/>
-          <a:ln>
-            <a:noFill/>
-          </a:ln>
-        </p:spPr>
-        <p:txBody>
-          <a:bodyPr wrap="none" lIns="0" tIns="0" rIns="0" bIns="0" anchor="t">
-            <a:noAutofit/>
-          </a:bodyPr>
-          <a:lstStyle/>
-          <a:p>
-            <a:pPr marL="0" indent="0">
-              <a:lnSpc>
-                <a:spcPts val="1755"/>
-              </a:lnSpc>
-              <a:spcAft>
-                <a:spcPts val="0"/>
-              </a:spcAft>
-              <a:buNone/>
-            </a:pPr>
-            <a:r>
-              <a:rPr lang="en-US" sz="1350" b="1">
-                <a:solidFill>
-                  <a:srgbClr val="A4D2C4"/>
-                </a:solidFill>
-                <a:latin typeface="Arial"/>
-                <a:ea typeface="Arial"/>
-                <a:cs typeface="Arial"/>
-              </a:rPr>
-              <a:t xml:space="preserve">08 / 08    SOURCE SLIDE 15</a:t>
-            </a:r>
-            <a:endParaRPr lang="en-US" sz="1350"/>
-          </a:p>
-        </p:txBody>
-      </p:sp>
-      <p:sp>
-        <p:nvSpPr>
-          <p:cNvPr id="3" name="Text 3"/>
-          <p:cNvSpPr txBox="1"/>
-          <p:nvPr/>
-        </p:nvSpPr>
-        <p:spPr>
-          <a:xfrm>
-            <a:off x="685800" y="1057275"/>
-            <a:ext cx="12344400" cy="1381125"/>
-          </a:xfrm>
-          <a:prstGeom prst="rect">
-            <a:avLst/>
-          </a:prstGeom>
-          <a:noFill/>
-          <a:ln>
-            <a:noFill/>
-          </a:ln>
-        </p:spPr>
-        <p:txBody>
-          <a:bodyPr wrap="none" lIns="0" tIns="0" rIns="0" bIns="0" anchor="t">
-            <a:noAutofit/>
-          </a:bodyPr>
-          <a:lstStyle/>
-          <a:p>
-            <a:pPr marL="0" indent="0">
-              <a:lnSpc>
-                <a:spcPts val="4680"/>
-              </a:lnSpc>
-              <a:spcAft>
-                <a:spcPts val="0"/>
-              </a:spcAft>
-              <a:buNone/>
-            </a:pPr>
-            <a:r>
-              <a:rPr lang="en-US" sz="3900" b="1">
-                <a:solidFill>
-                  <a:srgbClr val="F5F1E9"/>
-                </a:solidFill>
-                <a:latin typeface="Arial"/>
-                <a:ea typeface="Arial"/>
-                <a:cs typeface="Arial"/>
-              </a:rPr>
-              <a:t xml:space="preserve">The next surprise should cost less</a:t>
-            </a:r>
-            <a:endParaRPr lang="en-US" sz="3900"/>
-          </a:p>
-        </p:txBody>
-      </p:sp>
-      <p:sp>
-        <p:nvSpPr>
-          <p:cNvPr id="4" name="Text 4"/>
-          <p:cNvSpPr txBox="1"/>
-          <p:nvPr/>
-        </p:nvSpPr>
-        <p:spPr>
-          <a:xfrm>
-            <a:off x="685800" y="2771775"/>
-            <a:ext cx="904875" cy="476250"/>
-          </a:xfrm>
-          <a:prstGeom prst="rect">
-            <a:avLst/>
-          </a:prstGeom>
-          <a:noFill/>
-          <a:ln>
-            <a:noFill/>
-          </a:ln>
-        </p:spPr>
-        <p:txBody>
-          <a:bodyPr wrap="none" lIns="0" tIns="0" rIns="0" bIns="0" anchor="t">
-            <a:noAutofit/>
-          </a:bodyPr>
-          <a:lstStyle/>
-          <a:p>
-            <a:pPr marL="0" indent="0">
-              <a:lnSpc>
-                <a:spcPts val="2438"/>
-              </a:lnSpc>
-              <a:spcAft>
-                <a:spcPts val="0"/>
-              </a:spcAft>
-              <a:buNone/>
-            </a:pPr>
-            <a:r>
-              <a:rPr lang="en-US" sz="1875" b="0">
-                <a:solidFill>
-                  <a:srgbClr val="A4D2C4"/>
-                </a:solidFill>
-                <a:latin typeface="Arial"/>
-                <a:ea typeface="Arial"/>
-                <a:cs typeface="Arial"/>
-              </a:rPr>
-              <a:t xml:space="preserve">01</a:t>
-            </a:r>
-            <a:endParaRPr lang="en-US" sz="1875"/>
-          </a:p>
-        </p:txBody>
-      </p:sp>
-      <p:sp>
-        <p:nvSpPr>
-          <p:cNvPr id="5" name="Text 5"/>
-          <p:cNvSpPr txBox="1"/>
-          <p:nvPr/>
-        </p:nvSpPr>
-        <p:spPr>
-          <a:xfrm>
-            <a:off x="2000250" y="2771775"/>
             <a:ext cx="11029950" cy="539115"/>
           </a:xfrm>
           <a:prstGeom prst="rect">
@@ -7406,7 +5866,7 @@
                 <a:ea typeface="Arial"/>
                 <a:cs typeface="Arial"/>
               </a:rPr>
-              <a:t xml:space="preserve">8</a:t>
+              <a:t xml:space="preserve">7</a:t>
             </a:r>
             <a:endParaRPr lang="en-US" sz="975"/>
           </a:p>

--- a/artifacts/speaking-portfolio-expanded/decks/adaptive-systems-15min-screen.pptx
+++ b/artifacts/speaking-portfolio-expanded/decks/adaptive-systems-15min-screen.pptx
@@ -902,53 +902,53 @@
                 <a:ea typeface="Arial"/>
                 <a:cs typeface="Arial"/>
               </a:rPr>
-              <a:t xml:space="preserve">So here is the hazard, and it applies to the small systems too. Risk does not grow with the number of tools. It grows with the number of pathways between them, and every integration multiplies those. Ten tools is forty-five pairs before you count chains. Plug in one SaaS with a dozen endpoints and you did not add twelve capabilities; you added hundreds of routes from something the agent can read to something it can do. Nobody reviews those combinations. Not your security team, not the model, not you at three in the morning. The dangerous pairing is never on the roadmap. It gets discovered.</a:t>
-            </a:r>
-            <a:endParaRPr lang="en-US" sz="1200"/>
-          </a:p>
-          <a:p>
-            <a:pPr marL="0" indent="0">
-              <a:lnSpc>
-                <a:spcPts val="1560"/>
-              </a:lnSpc>
-              <a:spcAft>
-                <a:spcPts val="0"/>
-              </a:spcAft>
-              <a:buNone/>
-            </a:pPr>
-            <a:r>
-              <a:rPr lang="en-US" sz="1200" b="0">
-                <a:solidFill>
-                  <a:srgbClr val="202b33"/>
-                </a:solidFill>
-                <a:latin typeface="Arial"/>
-                <a:ea typeface="Arial"/>
-                <a:cs typeface="Arial"/>
-              </a:rPr>
-              <a:t xml:space="preserve"/>
-            </a:r>
-            <a:endParaRPr lang="en-US" sz="1200"/>
-          </a:p>
-          <a:p>
-            <a:pPr marL="0" indent="0">
-              <a:lnSpc>
-                <a:spcPts val="1560"/>
-              </a:lnSpc>
-              <a:spcAft>
-                <a:spcPts val="0"/>
-              </a:spcAft>
-              <a:buNone/>
-            </a:pPr>
-            <a:r>
-              <a:rPr lang="en-US" sz="1200" b="0">
-                <a:solidFill>
-                  <a:srgbClr val="202b33"/>
-                </a:solidFill>
-                <a:latin typeface="Arial"/>
-                <a:ea typeface="Arial"/>
-                <a:cs typeface="Arial"/>
-              </a:rPr>
-              <a:t xml:space="preserve">So the question is not whether to give the assistant access. It is how to keep the number of live pathways small enough to reason about, one job at a time. That is what the rest of this talk builds. The big assistant still exists. It just never has all of its hands full at once: it conjures a small agent per job, with exactly enough.</a:t>
+              <a:t xml:space="preserve">Here is the hazard, and it applies to the small systems too. Risk does not grow with the number of tools. It grows with the pathways between them, and every integration multiplies those. Ten tools is forty-five pairs before you count chains. Plug in one SaaS with a dozen endpoints and you did not add twelve capabilities; you added hundreds of routes from something the agent can read to something it can do. Nobody reviews those combinations. Not your security team, not the model, not you at three in the morning. The dangerous pairing is never on the roadmap. It gets discovered.</a:t>
+            </a:r>
+            <a:endParaRPr lang="en-US" sz="1200"/>
+          </a:p>
+          <a:p>
+            <a:pPr marL="0" indent="0">
+              <a:lnSpc>
+                <a:spcPts val="1560"/>
+              </a:lnSpc>
+              <a:spcAft>
+                <a:spcPts val="0"/>
+              </a:spcAft>
+              <a:buNone/>
+            </a:pPr>
+            <a:r>
+              <a:rPr lang="en-US" sz="1200" b="0">
+                <a:solidFill>
+                  <a:srgbClr val="202b33"/>
+                </a:solidFill>
+                <a:latin typeface="Arial"/>
+                <a:ea typeface="Arial"/>
+                <a:cs typeface="Arial"/>
+              </a:rPr>
+              <a:t xml:space="preserve"/>
+            </a:r>
+            <a:endParaRPr lang="en-US" sz="1200"/>
+          </a:p>
+          <a:p>
+            <a:pPr marL="0" indent="0">
+              <a:lnSpc>
+                <a:spcPts val="1560"/>
+              </a:lnSpc>
+              <a:spcAft>
+                <a:spcPts val="0"/>
+              </a:spcAft>
+              <a:buNone/>
+            </a:pPr>
+            <a:r>
+              <a:rPr lang="en-US" sz="1200" b="0">
+                <a:solidFill>
+                  <a:srgbClr val="202b33"/>
+                </a:solidFill>
+                <a:latin typeface="Arial"/>
+                <a:ea typeface="Arial"/>
+                <a:cs typeface="Arial"/>
+              </a:rPr>
+              <a:t xml:space="preserve">So the question is not whether to grant access. It is how many pathways are live at once. The big assistant still exists; it just never has all of its hands full at the same time, because it conjures a small agent per job with exactly enough.</a:t>
             </a:r>
             <a:endParaRPr lang="en-US" sz="1200"/>
           </a:p>
@@ -3399,7 +3399,7 @@
                 <a:ea typeface="Arial"/>
                 <a:cs typeface="Arial"/>
               </a:rPr>
-              <a:t xml:space="preserve">And return to the assistant with everything. It is still coming; nothing on these slides stops it, and I would not want to. What changed is how many of its pathways are live at once. Each job gets a small agent with a tailored prompt, a short tool list, a hard budget, and a log of every time it asked for more. That is the strategy I believe in for the next few years: not one agent holding every combination, which nobody can check, but many small ones you can afford to.</a:t>
+              <a:t xml:space="preserve">And return to the assistant with everything. It is still coming; nothing on these slides stops it, and I would not want them to. What changed is how many of its pathways are live at once. Not one agent holding every combination, which nobody can check. Many small ones you can afford to.</a:t>
             </a:r>
             <a:endParaRPr lang="en-US" sz="1200"/>
           </a:p>
